--- a/NorthSeaLateralityCongress_InesGarciaOrtiz.pptx
+++ b/NorthSeaLateralityCongress_InesGarciaOrtiz.pptx
@@ -5,19 +5,22 @@
     <p:sldMasterId id="2147483648" r:id="rId1"/>
   </p:sldMasterIdLst>
   <p:notesMasterIdLst>
-    <p:notesMasterId r:id="rId12"/>
+    <p:notesMasterId r:id="rId15"/>
   </p:notesMasterIdLst>
   <p:sldIdLst>
     <p:sldId id="256" r:id="rId2"/>
-    <p:sldId id="257" r:id="rId3"/>
-    <p:sldId id="259" r:id="rId4"/>
-    <p:sldId id="258" r:id="rId5"/>
-    <p:sldId id="260" r:id="rId6"/>
-    <p:sldId id="261" r:id="rId7"/>
-    <p:sldId id="262" r:id="rId8"/>
-    <p:sldId id="263" r:id="rId9"/>
-    <p:sldId id="264" r:id="rId10"/>
-    <p:sldId id="265" r:id="rId11"/>
+    <p:sldId id="267" r:id="rId3"/>
+    <p:sldId id="258" r:id="rId4"/>
+    <p:sldId id="257" r:id="rId5"/>
+    <p:sldId id="259" r:id="rId6"/>
+    <p:sldId id="260" r:id="rId7"/>
+    <p:sldId id="261" r:id="rId8"/>
+    <p:sldId id="266" r:id="rId9"/>
+    <p:sldId id="262" r:id="rId10"/>
+    <p:sldId id="263" r:id="rId11"/>
+    <p:sldId id="264" r:id="rId12"/>
+    <p:sldId id="265" r:id="rId13"/>
+    <p:sldId id="268" r:id="rId14"/>
   </p:sldIdLst>
   <p:sldSz cx="12192000" cy="6858000"/>
   <p:notesSz cx="6858000" cy="9144000"/>
@@ -227,7 +230,7 @@
           <a:p>
             <a:fld id="{72429232-80D2-4D0C-9CF8-9240E390AFC1}" type="datetimeFigureOut">
               <a:rPr lang="en-GB" smtClean="0"/>
-              <a:t>03/07/2026</a:t>
+              <a:t>29/07/2026</a:t>
             </a:fld>
             <a:endParaRPr lang="en-GB"/>
           </a:p>
@@ -560,7 +563,7 @@
           <a:p>
             <a:fld id="{21045F14-0841-498C-8B3E-B08368038B08}" type="slidenum">
               <a:rPr lang="en-GB" smtClean="0"/>
-              <a:t>3</a:t>
+              <a:t>5</a:t>
             </a:fld>
             <a:endParaRPr lang="en-GB"/>
           </a:p>
@@ -710,7 +713,7 @@
           <a:p>
             <a:fld id="{1AB6AF46-4ED5-4A87-8D9F-D0A79E912F4D}" type="datetimeFigureOut">
               <a:rPr lang="en-GB" smtClean="0"/>
-              <a:t>03/07/2026</a:t>
+              <a:t>29/07/2026</a:t>
             </a:fld>
             <a:endParaRPr lang="en-GB"/>
           </a:p>
@@ -880,7 +883,7 @@
           <a:p>
             <a:fld id="{1AB6AF46-4ED5-4A87-8D9F-D0A79E912F4D}" type="datetimeFigureOut">
               <a:rPr lang="en-GB" smtClean="0"/>
-              <a:t>03/07/2026</a:t>
+              <a:t>29/07/2026</a:t>
             </a:fld>
             <a:endParaRPr lang="en-GB"/>
           </a:p>
@@ -1060,7 +1063,7 @@
           <a:p>
             <a:fld id="{1AB6AF46-4ED5-4A87-8D9F-D0A79E912F4D}" type="datetimeFigureOut">
               <a:rPr lang="en-GB" smtClean="0"/>
-              <a:t>03/07/2026</a:t>
+              <a:t>29/07/2026</a:t>
             </a:fld>
             <a:endParaRPr lang="en-GB"/>
           </a:p>
@@ -1230,7 +1233,7 @@
           <a:p>
             <a:fld id="{1AB6AF46-4ED5-4A87-8D9F-D0A79E912F4D}" type="datetimeFigureOut">
               <a:rPr lang="en-GB" smtClean="0"/>
-              <a:t>03/07/2026</a:t>
+              <a:t>29/07/2026</a:t>
             </a:fld>
             <a:endParaRPr lang="en-GB"/>
           </a:p>
@@ -1476,7 +1479,7 @@
           <a:p>
             <a:fld id="{1AB6AF46-4ED5-4A87-8D9F-D0A79E912F4D}" type="datetimeFigureOut">
               <a:rPr lang="en-GB" smtClean="0"/>
-              <a:t>03/07/2026</a:t>
+              <a:t>29/07/2026</a:t>
             </a:fld>
             <a:endParaRPr lang="en-GB"/>
           </a:p>
@@ -1708,7 +1711,7 @@
           <a:p>
             <a:fld id="{1AB6AF46-4ED5-4A87-8D9F-D0A79E912F4D}" type="datetimeFigureOut">
               <a:rPr lang="en-GB" smtClean="0"/>
-              <a:t>03/07/2026</a:t>
+              <a:t>29/07/2026</a:t>
             </a:fld>
             <a:endParaRPr lang="en-GB"/>
           </a:p>
@@ -2075,7 +2078,7 @@
           <a:p>
             <a:fld id="{1AB6AF46-4ED5-4A87-8D9F-D0A79E912F4D}" type="datetimeFigureOut">
               <a:rPr lang="en-GB" smtClean="0"/>
-              <a:t>03/07/2026</a:t>
+              <a:t>29/07/2026</a:t>
             </a:fld>
             <a:endParaRPr lang="en-GB"/>
           </a:p>
@@ -2193,7 +2196,7 @@
           <a:p>
             <a:fld id="{1AB6AF46-4ED5-4A87-8D9F-D0A79E912F4D}" type="datetimeFigureOut">
               <a:rPr lang="en-GB" smtClean="0"/>
-              <a:t>03/07/2026</a:t>
+              <a:t>29/07/2026</a:t>
             </a:fld>
             <a:endParaRPr lang="en-GB"/>
           </a:p>
@@ -2288,7 +2291,7 @@
           <a:p>
             <a:fld id="{1AB6AF46-4ED5-4A87-8D9F-D0A79E912F4D}" type="datetimeFigureOut">
               <a:rPr lang="en-GB" smtClean="0"/>
-              <a:t>03/07/2026</a:t>
+              <a:t>29/07/2026</a:t>
             </a:fld>
             <a:endParaRPr lang="en-GB"/>
           </a:p>
@@ -2565,7 +2568,7 @@
           <a:p>
             <a:fld id="{1AB6AF46-4ED5-4A87-8D9F-D0A79E912F4D}" type="datetimeFigureOut">
               <a:rPr lang="en-GB" smtClean="0"/>
-              <a:t>03/07/2026</a:t>
+              <a:t>29/07/2026</a:t>
             </a:fld>
             <a:endParaRPr lang="en-GB"/>
           </a:p>
@@ -2818,7 +2821,7 @@
           <a:p>
             <a:fld id="{1AB6AF46-4ED5-4A87-8D9F-D0A79E912F4D}" type="datetimeFigureOut">
               <a:rPr lang="en-GB" smtClean="0"/>
-              <a:t>03/07/2026</a:t>
+              <a:t>29/07/2026</a:t>
             </a:fld>
             <a:endParaRPr lang="en-GB"/>
           </a:p>
@@ -3031,7 +3034,7 @@
           <a:p>
             <a:fld id="{1AB6AF46-4ED5-4A87-8D9F-D0A79E912F4D}" type="datetimeFigureOut">
               <a:rPr lang="en-GB" smtClean="0"/>
-              <a:t>03/07/2026</a:t>
+              <a:t>29/07/2026</a:t>
             </a:fld>
             <a:endParaRPr lang="en-GB"/>
           </a:p>
@@ -3496,13 +3499,8 @@
           <a:p>
             <a:r>
               <a:rPr lang="es-ES" dirty="0" smtClean="0"/>
-              <a:t>Inés </a:t>
-            </a:r>
-            <a:r>
-              <a:rPr lang="es-ES" dirty="0" smtClean="0"/>
-              <a:t>García-Ortiz</a:t>
-            </a:r>
-            <a:endParaRPr lang="es-ES" dirty="0" smtClean="0"/>
+              <a:t>Inés García-Ortiz</a:t>
+            </a:r>
           </a:p>
           <a:p>
             <a:r>
@@ -3653,6 +3651,149 @@
           <a:p>
             <a:r>
               <a:rPr lang="es-ES" dirty="0" err="1" smtClean="0"/>
+              <a:t>Within</a:t>
+            </a:r>
+            <a:r>
+              <a:rPr lang="es-ES" dirty="0" smtClean="0"/>
+              <a:t> BD</a:t>
+            </a:r>
+            <a:endParaRPr lang="en-GB" dirty="0"/>
+          </a:p>
+        </p:txBody>
+      </p:sp>
+    </p:spTree>
+    <p:extLst>
+      <p:ext uri="{BB962C8B-B14F-4D97-AF65-F5344CB8AC3E}">
+        <p14:creationId xmlns:p14="http://schemas.microsoft.com/office/powerpoint/2010/main" val="2591658526"/>
+      </p:ext>
+    </p:extLst>
+  </p:cSld>
+  <p:clrMapOvr>
+    <a:masterClrMapping/>
+  </p:clrMapOvr>
+  <p:timing>
+    <p:tnLst>
+      <p:par>
+        <p:cTn id="1" dur="indefinite" restart="never" nodeType="tmRoot"/>
+      </p:par>
+    </p:tnLst>
+  </p:timing>
+</p:sld>
+</file>
+
+<file path=ppt/slides/slide11.xml><?xml version="1.0" encoding="utf-8"?>
+<p:sld xmlns:a="http://schemas.openxmlformats.org/drawingml/2006/main" xmlns:r="http://schemas.openxmlformats.org/officeDocument/2006/relationships" xmlns:p="http://schemas.openxmlformats.org/presentationml/2006/main">
+  <p:cSld>
+    <p:spTree>
+      <p:nvGrpSpPr>
+        <p:cNvPr id="1" name=""/>
+        <p:cNvGrpSpPr/>
+        <p:nvPr/>
+      </p:nvGrpSpPr>
+      <p:grpSpPr>
+        <a:xfrm>
+          <a:off x="0" y="0"/>
+          <a:ext cx="0" cy="0"/>
+          <a:chOff x="0" y="0"/>
+          <a:chExt cx="0" cy="0"/>
+        </a:xfrm>
+      </p:grpSpPr>
+      <p:sp>
+        <p:nvSpPr>
+          <p:cNvPr id="2" name="Título 1"/>
+          <p:cNvSpPr>
+            <a:spLocks noGrp="1"/>
+          </p:cNvSpPr>
+          <p:nvPr>
+            <p:ph type="title"/>
+          </p:nvPr>
+        </p:nvSpPr>
+        <p:spPr/>
+        <p:txBody>
+          <a:bodyPr/>
+          <a:lstStyle/>
+          <a:p>
+            <a:r>
+              <a:rPr lang="es-ES" dirty="0" smtClean="0"/>
+              <a:t>PRS</a:t>
+            </a:r>
+            <a:endParaRPr lang="en-GB" dirty="0"/>
+          </a:p>
+        </p:txBody>
+      </p:sp>
+      <p:sp>
+        <p:nvSpPr>
+          <p:cNvPr id="3" name="Marcador de contenido 2"/>
+          <p:cNvSpPr>
+            <a:spLocks noGrp="1"/>
+          </p:cNvSpPr>
+          <p:nvPr>
+            <p:ph idx="1"/>
+          </p:nvPr>
+        </p:nvSpPr>
+        <p:spPr/>
+        <p:txBody>
+          <a:bodyPr/>
+          <a:lstStyle/>
+          <a:p>
+            <a:endParaRPr lang="en-GB"/>
+          </a:p>
+        </p:txBody>
+      </p:sp>
+    </p:spTree>
+    <p:extLst>
+      <p:ext uri="{BB962C8B-B14F-4D97-AF65-F5344CB8AC3E}">
+        <p14:creationId xmlns:p14="http://schemas.microsoft.com/office/powerpoint/2010/main" val="989496482"/>
+      </p:ext>
+    </p:extLst>
+  </p:cSld>
+  <p:clrMapOvr>
+    <a:masterClrMapping/>
+  </p:clrMapOvr>
+  <p:timing>
+    <p:tnLst>
+      <p:par>
+        <p:cTn id="1" dur="indefinite" restart="never" nodeType="tmRoot"/>
+      </p:par>
+    </p:tnLst>
+  </p:timing>
+</p:sld>
+</file>
+
+<file path=ppt/slides/slide12.xml><?xml version="1.0" encoding="utf-8"?>
+<p:sld xmlns:a="http://schemas.openxmlformats.org/drawingml/2006/main" xmlns:r="http://schemas.openxmlformats.org/officeDocument/2006/relationships" xmlns:p="http://schemas.openxmlformats.org/presentationml/2006/main">
+  <p:cSld>
+    <p:spTree>
+      <p:nvGrpSpPr>
+        <p:cNvPr id="1" name=""/>
+        <p:cNvGrpSpPr/>
+        <p:nvPr/>
+      </p:nvGrpSpPr>
+      <p:grpSpPr>
+        <a:xfrm>
+          <a:off x="0" y="0"/>
+          <a:ext cx="0" cy="0"/>
+          <a:chOff x="0" y="0"/>
+          <a:chExt cx="0" cy="0"/>
+        </a:xfrm>
+      </p:grpSpPr>
+      <p:sp>
+        <p:nvSpPr>
+          <p:cNvPr id="2" name="Título 1"/>
+          <p:cNvSpPr>
+            <a:spLocks noGrp="1"/>
+          </p:cNvSpPr>
+          <p:nvPr>
+            <p:ph type="title"/>
+          </p:nvPr>
+        </p:nvSpPr>
+        <p:spPr/>
+        <p:txBody>
+          <a:bodyPr/>
+          <a:lstStyle/>
+          <a:p>
+            <a:r>
+              <a:rPr lang="es-ES" dirty="0" err="1" smtClean="0"/>
               <a:t>Discussion</a:t>
             </a:r>
             <a:endParaRPr lang="en-GB" dirty="0"/>
@@ -3698,7 +3839,1615 @@
 </p:sld>
 </file>
 
+<file path=ppt/slides/slide13.xml><?xml version="1.0" encoding="utf-8"?>
+<p:sld xmlns:a="http://schemas.openxmlformats.org/drawingml/2006/main" xmlns:r="http://schemas.openxmlformats.org/officeDocument/2006/relationships" xmlns:p="http://schemas.openxmlformats.org/presentationml/2006/main">
+  <p:cSld>
+    <p:spTree>
+      <p:nvGrpSpPr>
+        <p:cNvPr id="1" name=""/>
+        <p:cNvGrpSpPr/>
+        <p:nvPr/>
+      </p:nvGrpSpPr>
+      <p:grpSpPr>
+        <a:xfrm>
+          <a:off x="0" y="0"/>
+          <a:ext cx="0" cy="0"/>
+          <a:chOff x="0" y="0"/>
+          <a:chExt cx="0" cy="0"/>
+        </a:xfrm>
+      </p:grpSpPr>
+      <p:sp>
+        <p:nvSpPr>
+          <p:cNvPr id="2" name="Título 1"/>
+          <p:cNvSpPr>
+            <a:spLocks noGrp="1"/>
+          </p:cNvSpPr>
+          <p:nvPr>
+            <p:ph type="title"/>
+          </p:nvPr>
+        </p:nvSpPr>
+        <p:spPr/>
+        <p:txBody>
+          <a:bodyPr/>
+          <a:lstStyle/>
+          <a:p>
+            <a:r>
+              <a:rPr lang="es-ES" dirty="0" err="1" smtClean="0"/>
+              <a:t>Acknowledgements</a:t>
+            </a:r>
+            <a:endParaRPr lang="en-GB" dirty="0"/>
+          </a:p>
+        </p:txBody>
+      </p:sp>
+      <p:sp>
+        <p:nvSpPr>
+          <p:cNvPr id="3" name="Marcador de contenido 2"/>
+          <p:cNvSpPr>
+            <a:spLocks noGrp="1"/>
+          </p:cNvSpPr>
+          <p:nvPr>
+            <p:ph idx="1"/>
+          </p:nvPr>
+        </p:nvSpPr>
+        <p:spPr/>
+        <p:txBody>
+          <a:bodyPr/>
+          <a:lstStyle/>
+          <a:p>
+            <a:endParaRPr lang="en-GB"/>
+          </a:p>
+        </p:txBody>
+      </p:sp>
+    </p:spTree>
+    <p:extLst>
+      <p:ext uri="{BB962C8B-B14F-4D97-AF65-F5344CB8AC3E}">
+        <p14:creationId xmlns:p14="http://schemas.microsoft.com/office/powerpoint/2010/main" val="2452400296"/>
+      </p:ext>
+    </p:extLst>
+  </p:cSld>
+  <p:clrMapOvr>
+    <a:masterClrMapping/>
+  </p:clrMapOvr>
+</p:sld>
+</file>
+
 <file path=ppt/slides/slide2.xml><?xml version="1.0" encoding="utf-8"?>
+<p:sld xmlns:a="http://schemas.openxmlformats.org/drawingml/2006/main" xmlns:r="http://schemas.openxmlformats.org/officeDocument/2006/relationships" xmlns:p="http://schemas.openxmlformats.org/presentationml/2006/main">
+  <p:cSld>
+    <p:spTree>
+      <p:nvGrpSpPr>
+        <p:cNvPr id="1" name=""/>
+        <p:cNvGrpSpPr/>
+        <p:nvPr/>
+      </p:nvGrpSpPr>
+      <p:grpSpPr>
+        <a:xfrm>
+          <a:off x="0" y="0"/>
+          <a:ext cx="0" cy="0"/>
+          <a:chOff x="0" y="0"/>
+          <a:chExt cx="0" cy="0"/>
+        </a:xfrm>
+      </p:grpSpPr>
+      <p:sp>
+        <p:nvSpPr>
+          <p:cNvPr id="2" name="Título 1"/>
+          <p:cNvSpPr>
+            <a:spLocks noGrp="1"/>
+          </p:cNvSpPr>
+          <p:nvPr>
+            <p:ph type="title"/>
+          </p:nvPr>
+        </p:nvSpPr>
+        <p:spPr>
+          <a:xfrm>
+            <a:off x="847077" y="109048"/>
+            <a:ext cx="10515600" cy="986714"/>
+          </a:xfrm>
+        </p:spPr>
+        <p:txBody>
+          <a:bodyPr>
+            <a:normAutofit/>
+          </a:bodyPr>
+          <a:lstStyle/>
+          <a:p>
+            <a:pPr algn="ctr"/>
+            <a:r>
+              <a:rPr lang="es-ES" sz="4000" b="1" dirty="0"/>
+              <a:t>Bipolar </a:t>
+            </a:r>
+            <a:r>
+              <a:rPr lang="es-ES" sz="4000" b="1" dirty="0" err="1"/>
+              <a:t>disorder</a:t>
+            </a:r>
+            <a:endParaRPr lang="en-GB" sz="4000" b="1" dirty="0"/>
+          </a:p>
+        </p:txBody>
+      </p:sp>
+      <p:cxnSp>
+        <p:nvCxnSpPr>
+          <p:cNvPr id="4" name="Straight Connector 4"/>
+          <p:cNvCxnSpPr/>
+          <p:nvPr/>
+        </p:nvCxnSpPr>
+        <p:spPr>
+          <a:xfrm flipH="1">
+            <a:off x="932055" y="1448421"/>
+            <a:ext cx="4665" cy="4455743"/>
+          </a:xfrm>
+          <a:prstGeom prst="line">
+            <a:avLst/>
+          </a:prstGeom>
+          <a:ln>
+            <a:solidFill>
+              <a:schemeClr val="tx1"/>
+            </a:solidFill>
+          </a:ln>
+        </p:spPr>
+        <p:style>
+          <a:lnRef idx="3">
+            <a:schemeClr val="dk1"/>
+          </a:lnRef>
+          <a:fillRef idx="0">
+            <a:schemeClr val="dk1"/>
+          </a:fillRef>
+          <a:effectRef idx="2">
+            <a:schemeClr val="dk1"/>
+          </a:effectRef>
+          <a:fontRef idx="minor">
+            <a:schemeClr val="tx1"/>
+          </a:fontRef>
+        </p:style>
+      </p:cxnSp>
+      <p:cxnSp>
+        <p:nvCxnSpPr>
+          <p:cNvPr id="5" name="Straight Connector 6"/>
+          <p:cNvCxnSpPr/>
+          <p:nvPr/>
+        </p:nvCxnSpPr>
+        <p:spPr>
+          <a:xfrm>
+            <a:off x="932055" y="3689817"/>
+            <a:ext cx="7427168" cy="0"/>
+          </a:xfrm>
+          <a:prstGeom prst="line">
+            <a:avLst/>
+          </a:prstGeom>
+          <a:ln>
+            <a:solidFill>
+              <a:schemeClr val="tx1"/>
+            </a:solidFill>
+          </a:ln>
+        </p:spPr>
+        <p:style>
+          <a:lnRef idx="3">
+            <a:schemeClr val="dk1"/>
+          </a:lnRef>
+          <a:fillRef idx="0">
+            <a:schemeClr val="dk1"/>
+          </a:fillRef>
+          <a:effectRef idx="2">
+            <a:schemeClr val="dk1"/>
+          </a:effectRef>
+          <a:fontRef idx="minor">
+            <a:schemeClr val="tx1"/>
+          </a:fontRef>
+        </p:style>
+      </p:cxnSp>
+      <p:sp>
+        <p:nvSpPr>
+          <p:cNvPr id="6" name="TextBox 7"/>
+          <p:cNvSpPr txBox="1"/>
+          <p:nvPr/>
+        </p:nvSpPr>
+        <p:spPr>
+          <a:xfrm>
+            <a:off x="956565" y="2802615"/>
+            <a:ext cx="918855" cy="430887"/>
+          </a:xfrm>
+          <a:prstGeom prst="rect">
+            <a:avLst/>
+          </a:prstGeom>
+          <a:noFill/>
+          <a:ln>
+            <a:solidFill>
+              <a:srgbClr val="FF0000"/>
+            </a:solidFill>
+          </a:ln>
+        </p:spPr>
+        <p:txBody>
+          <a:bodyPr wrap="square" rtlCol="0">
+            <a:spAutoFit/>
+          </a:bodyPr>
+          <a:lstStyle/>
+          <a:p>
+            <a:r>
+              <a:rPr lang="en-AU" sz="2200" b="1" dirty="0"/>
+              <a:t>Mood</a:t>
+            </a:r>
+          </a:p>
+        </p:txBody>
+      </p:sp>
+      <p:sp>
+        <p:nvSpPr>
+          <p:cNvPr id="7" name="TextBox 8"/>
+          <p:cNvSpPr txBox="1"/>
+          <p:nvPr/>
+        </p:nvSpPr>
+        <p:spPr>
+          <a:xfrm>
+            <a:off x="6053207" y="4884354"/>
+            <a:ext cx="1470722" cy="430887"/>
+          </a:xfrm>
+          <a:prstGeom prst="rect">
+            <a:avLst/>
+          </a:prstGeom>
+          <a:ln/>
+        </p:spPr>
+        <p:style>
+          <a:lnRef idx="0">
+            <a:schemeClr val="dk1"/>
+          </a:lnRef>
+          <a:fillRef idx="3">
+            <a:schemeClr val="dk1"/>
+          </a:fillRef>
+          <a:effectRef idx="3">
+            <a:schemeClr val="dk1"/>
+          </a:effectRef>
+          <a:fontRef idx="minor">
+            <a:schemeClr val="lt1"/>
+          </a:fontRef>
+        </p:style>
+        <p:txBody>
+          <a:bodyPr wrap="square" rtlCol="0">
+            <a:spAutoFit/>
+          </a:bodyPr>
+          <a:lstStyle/>
+          <a:p>
+            <a:r>
+              <a:rPr lang="en-AU" sz="2200" dirty="0">
+                <a:latin typeface="Calibri" panose="020F0502020204030204" pitchFamily="34" charset="0"/>
+                <a:cs typeface="Calibri" panose="020F0502020204030204" pitchFamily="34" charset="0"/>
+              </a:rPr>
+              <a:t>Depression</a:t>
+            </a:r>
+          </a:p>
+        </p:txBody>
+      </p:sp>
+      <p:sp>
+        <p:nvSpPr>
+          <p:cNvPr id="8" name="TextBox 9"/>
+          <p:cNvSpPr txBox="1"/>
+          <p:nvPr/>
+        </p:nvSpPr>
+        <p:spPr>
+          <a:xfrm>
+            <a:off x="6158628" y="1468674"/>
+            <a:ext cx="923503" cy="430887"/>
+          </a:xfrm>
+          <a:prstGeom prst="rect">
+            <a:avLst/>
+          </a:prstGeom>
+          <a:ln/>
+        </p:spPr>
+        <p:style>
+          <a:lnRef idx="3">
+            <a:schemeClr val="lt1"/>
+          </a:lnRef>
+          <a:fillRef idx="1">
+            <a:schemeClr val="accent4"/>
+          </a:fillRef>
+          <a:effectRef idx="1">
+            <a:schemeClr val="accent4"/>
+          </a:effectRef>
+          <a:fontRef idx="minor">
+            <a:schemeClr val="lt1"/>
+          </a:fontRef>
+        </p:style>
+        <p:txBody>
+          <a:bodyPr wrap="square" rtlCol="0">
+            <a:spAutoFit/>
+          </a:bodyPr>
+          <a:lstStyle/>
+          <a:p>
+            <a:r>
+              <a:rPr lang="en-AU" sz="2200" b="1" dirty="0">
+                <a:latin typeface="Calibri" panose="020F0502020204030204" pitchFamily="34" charset="0"/>
+                <a:cs typeface="Calibri" panose="020F0502020204030204" pitchFamily="34" charset="0"/>
+              </a:rPr>
+              <a:t>Mania</a:t>
+            </a:r>
+          </a:p>
+        </p:txBody>
+      </p:sp>
+      <p:sp>
+        <p:nvSpPr>
+          <p:cNvPr id="9" name="Freeform 22"/>
+          <p:cNvSpPr/>
+          <p:nvPr/>
+        </p:nvSpPr>
+        <p:spPr>
+          <a:xfrm>
+            <a:off x="932055" y="1327373"/>
+            <a:ext cx="7152435" cy="4697838"/>
+          </a:xfrm>
+          <a:custGeom>
+            <a:avLst/>
+            <a:gdLst>
+              <a:gd name="connsiteX0" fmla="*/ 0 w 7124700"/>
+              <a:gd name="connsiteY0" fmla="*/ 2007845 h 3964665"/>
+              <a:gd name="connsiteX1" fmla="*/ 472440 w 7124700"/>
+              <a:gd name="connsiteY1" fmla="*/ 2099285 h 3964665"/>
+              <a:gd name="connsiteX2" fmla="*/ 853440 w 7124700"/>
+              <a:gd name="connsiteY2" fmla="*/ 3211805 h 3964665"/>
+              <a:gd name="connsiteX3" fmla="*/ 1196340 w 7124700"/>
+              <a:gd name="connsiteY3" fmla="*/ 3785 h 3964665"/>
+              <a:gd name="connsiteX4" fmla="*/ 1645920 w 7124700"/>
+              <a:gd name="connsiteY4" fmla="*/ 3958565 h 3964665"/>
+              <a:gd name="connsiteX5" fmla="*/ 1950720 w 7124700"/>
+              <a:gd name="connsiteY5" fmla="*/ 956285 h 3964665"/>
+              <a:gd name="connsiteX6" fmla="*/ 2247900 w 7124700"/>
+              <a:gd name="connsiteY6" fmla="*/ 2937485 h 3964665"/>
+              <a:gd name="connsiteX7" fmla="*/ 2674620 w 7124700"/>
+              <a:gd name="connsiteY7" fmla="*/ 41885 h 3964665"/>
+              <a:gd name="connsiteX8" fmla="*/ 2910840 w 7124700"/>
+              <a:gd name="connsiteY8" fmla="*/ 3950945 h 3964665"/>
+              <a:gd name="connsiteX9" fmla="*/ 3268980 w 7124700"/>
+              <a:gd name="connsiteY9" fmla="*/ 941045 h 3964665"/>
+              <a:gd name="connsiteX10" fmla="*/ 3703320 w 7124700"/>
+              <a:gd name="connsiteY10" fmla="*/ 3851885 h 3964665"/>
+              <a:gd name="connsiteX11" fmla="*/ 3947160 w 7124700"/>
+              <a:gd name="connsiteY11" fmla="*/ 133325 h 3964665"/>
+              <a:gd name="connsiteX12" fmla="*/ 4038600 w 7124700"/>
+              <a:gd name="connsiteY12" fmla="*/ 3783305 h 3964665"/>
+              <a:gd name="connsiteX13" fmla="*/ 4274820 w 7124700"/>
+              <a:gd name="connsiteY13" fmla="*/ 194285 h 3964665"/>
+              <a:gd name="connsiteX14" fmla="*/ 4358640 w 7124700"/>
+              <a:gd name="connsiteY14" fmla="*/ 3798545 h 3964665"/>
+              <a:gd name="connsiteX15" fmla="*/ 4579620 w 7124700"/>
+              <a:gd name="connsiteY15" fmla="*/ 232385 h 3964665"/>
+              <a:gd name="connsiteX16" fmla="*/ 4648200 w 7124700"/>
+              <a:gd name="connsiteY16" fmla="*/ 3783305 h 3964665"/>
+              <a:gd name="connsiteX17" fmla="*/ 4899660 w 7124700"/>
+              <a:gd name="connsiteY17" fmla="*/ 1322045 h 3964665"/>
+              <a:gd name="connsiteX18" fmla="*/ 5273040 w 7124700"/>
+              <a:gd name="connsiteY18" fmla="*/ 2228825 h 3964665"/>
+              <a:gd name="connsiteX19" fmla="*/ 5905500 w 7124700"/>
+              <a:gd name="connsiteY19" fmla="*/ 2007845 h 3964665"/>
+              <a:gd name="connsiteX20" fmla="*/ 7124700 w 7124700"/>
+              <a:gd name="connsiteY20" fmla="*/ 1977365 h 3964665"/>
+              <a:gd name="connsiteX21" fmla="*/ 7124700 w 7124700"/>
+              <a:gd name="connsiteY21" fmla="*/ 1977365 h 3964665"/>
+            </a:gdLst>
+            <a:ahLst/>
+            <a:cxnLst>
+              <a:cxn ang="0">
+                <a:pos x="connsiteX0" y="connsiteY0"/>
+              </a:cxn>
+              <a:cxn ang="0">
+                <a:pos x="connsiteX1" y="connsiteY1"/>
+              </a:cxn>
+              <a:cxn ang="0">
+                <a:pos x="connsiteX2" y="connsiteY2"/>
+              </a:cxn>
+              <a:cxn ang="0">
+                <a:pos x="connsiteX3" y="connsiteY3"/>
+              </a:cxn>
+              <a:cxn ang="0">
+                <a:pos x="connsiteX4" y="connsiteY4"/>
+              </a:cxn>
+              <a:cxn ang="0">
+                <a:pos x="connsiteX5" y="connsiteY5"/>
+              </a:cxn>
+              <a:cxn ang="0">
+                <a:pos x="connsiteX6" y="connsiteY6"/>
+              </a:cxn>
+              <a:cxn ang="0">
+                <a:pos x="connsiteX7" y="connsiteY7"/>
+              </a:cxn>
+              <a:cxn ang="0">
+                <a:pos x="connsiteX8" y="connsiteY8"/>
+              </a:cxn>
+              <a:cxn ang="0">
+                <a:pos x="connsiteX9" y="connsiteY9"/>
+              </a:cxn>
+              <a:cxn ang="0">
+                <a:pos x="connsiteX10" y="connsiteY10"/>
+              </a:cxn>
+              <a:cxn ang="0">
+                <a:pos x="connsiteX11" y="connsiteY11"/>
+              </a:cxn>
+              <a:cxn ang="0">
+                <a:pos x="connsiteX12" y="connsiteY12"/>
+              </a:cxn>
+              <a:cxn ang="0">
+                <a:pos x="connsiteX13" y="connsiteY13"/>
+              </a:cxn>
+              <a:cxn ang="0">
+                <a:pos x="connsiteX14" y="connsiteY14"/>
+              </a:cxn>
+              <a:cxn ang="0">
+                <a:pos x="connsiteX15" y="connsiteY15"/>
+              </a:cxn>
+              <a:cxn ang="0">
+                <a:pos x="connsiteX16" y="connsiteY16"/>
+              </a:cxn>
+              <a:cxn ang="0">
+                <a:pos x="connsiteX17" y="connsiteY17"/>
+              </a:cxn>
+              <a:cxn ang="0">
+                <a:pos x="connsiteX18" y="connsiteY18"/>
+              </a:cxn>
+              <a:cxn ang="0">
+                <a:pos x="connsiteX19" y="connsiteY19"/>
+              </a:cxn>
+              <a:cxn ang="0">
+                <a:pos x="connsiteX20" y="connsiteY20"/>
+              </a:cxn>
+              <a:cxn ang="0">
+                <a:pos x="connsiteX21" y="connsiteY21"/>
+              </a:cxn>
+            </a:cxnLst>
+            <a:rect l="l" t="t" r="r" b="b"/>
+            <a:pathLst>
+              <a:path w="7124700" h="3964665">
+                <a:moveTo>
+                  <a:pt x="0" y="2007845"/>
+                </a:moveTo>
+                <a:cubicBezTo>
+                  <a:pt x="165100" y="1953235"/>
+                  <a:pt x="330200" y="1898625"/>
+                  <a:pt x="472440" y="2099285"/>
+                </a:cubicBezTo>
+                <a:cubicBezTo>
+                  <a:pt x="614680" y="2299945"/>
+                  <a:pt x="732790" y="3561055"/>
+                  <a:pt x="853440" y="3211805"/>
+                </a:cubicBezTo>
+                <a:cubicBezTo>
+                  <a:pt x="974090" y="2862555"/>
+                  <a:pt x="1064260" y="-120675"/>
+                  <a:pt x="1196340" y="3785"/>
+                </a:cubicBezTo>
+                <a:cubicBezTo>
+                  <a:pt x="1328420" y="128245"/>
+                  <a:pt x="1520190" y="3799815"/>
+                  <a:pt x="1645920" y="3958565"/>
+                </a:cubicBezTo>
+                <a:cubicBezTo>
+                  <a:pt x="1771650" y="4117315"/>
+                  <a:pt x="1850390" y="1126465"/>
+                  <a:pt x="1950720" y="956285"/>
+                </a:cubicBezTo>
+                <a:cubicBezTo>
+                  <a:pt x="2051050" y="786105"/>
+                  <a:pt x="2127250" y="3089885"/>
+                  <a:pt x="2247900" y="2937485"/>
+                </a:cubicBezTo>
+                <a:cubicBezTo>
+                  <a:pt x="2368550" y="2785085"/>
+                  <a:pt x="2564130" y="-127025"/>
+                  <a:pt x="2674620" y="41885"/>
+                </a:cubicBezTo>
+                <a:cubicBezTo>
+                  <a:pt x="2785110" y="210795"/>
+                  <a:pt x="2811780" y="3801085"/>
+                  <a:pt x="2910840" y="3950945"/>
+                </a:cubicBezTo>
+                <a:cubicBezTo>
+                  <a:pt x="3009900" y="4100805"/>
+                  <a:pt x="3136900" y="957555"/>
+                  <a:pt x="3268980" y="941045"/>
+                </a:cubicBezTo>
+                <a:cubicBezTo>
+                  <a:pt x="3401060" y="924535"/>
+                  <a:pt x="3590290" y="3986505"/>
+                  <a:pt x="3703320" y="3851885"/>
+                </a:cubicBezTo>
+                <a:cubicBezTo>
+                  <a:pt x="3816350" y="3717265"/>
+                  <a:pt x="3891280" y="144755"/>
+                  <a:pt x="3947160" y="133325"/>
+                </a:cubicBezTo>
+                <a:cubicBezTo>
+                  <a:pt x="4003040" y="121895"/>
+                  <a:pt x="3983990" y="3773145"/>
+                  <a:pt x="4038600" y="3783305"/>
+                </a:cubicBezTo>
+                <a:cubicBezTo>
+                  <a:pt x="4093210" y="3793465"/>
+                  <a:pt x="4221480" y="191745"/>
+                  <a:pt x="4274820" y="194285"/>
+                </a:cubicBezTo>
+                <a:cubicBezTo>
+                  <a:pt x="4328160" y="196825"/>
+                  <a:pt x="4307840" y="3792195"/>
+                  <a:pt x="4358640" y="3798545"/>
+                </a:cubicBezTo>
+                <a:cubicBezTo>
+                  <a:pt x="4409440" y="3804895"/>
+                  <a:pt x="4531360" y="234925"/>
+                  <a:pt x="4579620" y="232385"/>
+                </a:cubicBezTo>
+                <a:cubicBezTo>
+                  <a:pt x="4627880" y="229845"/>
+                  <a:pt x="4594860" y="3601695"/>
+                  <a:pt x="4648200" y="3783305"/>
+                </a:cubicBezTo>
+                <a:cubicBezTo>
+                  <a:pt x="4701540" y="3964915"/>
+                  <a:pt x="4795520" y="1581125"/>
+                  <a:pt x="4899660" y="1322045"/>
+                </a:cubicBezTo>
+                <a:cubicBezTo>
+                  <a:pt x="5003800" y="1062965"/>
+                  <a:pt x="5105400" y="2114525"/>
+                  <a:pt x="5273040" y="2228825"/>
+                </a:cubicBezTo>
+                <a:cubicBezTo>
+                  <a:pt x="5440680" y="2343125"/>
+                  <a:pt x="5596890" y="2049755"/>
+                  <a:pt x="5905500" y="2007845"/>
+                </a:cubicBezTo>
+                <a:cubicBezTo>
+                  <a:pt x="6214110" y="1965935"/>
+                  <a:pt x="7124700" y="1977365"/>
+                  <a:pt x="7124700" y="1977365"/>
+                </a:cubicBezTo>
+                <a:lnTo>
+                  <a:pt x="7124700" y="1977365"/>
+                </a:lnTo>
+              </a:path>
+            </a:pathLst>
+          </a:custGeom>
+          <a:noFill/>
+          <a:ln w="28575">
+            <a:prstDash val="sysDash"/>
+          </a:ln>
+        </p:spPr>
+        <p:style>
+          <a:lnRef idx="2">
+            <a:schemeClr val="accent1">
+              <a:shade val="50000"/>
+            </a:schemeClr>
+          </a:lnRef>
+          <a:fillRef idx="1">
+            <a:schemeClr val="accent1"/>
+          </a:fillRef>
+          <a:effectRef idx="0">
+            <a:schemeClr val="accent1"/>
+          </a:effectRef>
+          <a:fontRef idx="minor">
+            <a:schemeClr val="lt1"/>
+          </a:fontRef>
+        </p:style>
+        <p:txBody>
+          <a:bodyPr rtlCol="0" anchor="ctr"/>
+          <a:lstStyle/>
+          <a:p>
+            <a:pPr algn="ctr"/>
+            <a:endParaRPr lang="en-AU" dirty="0"/>
+          </a:p>
+        </p:txBody>
+      </p:sp>
+      <p:cxnSp>
+        <p:nvCxnSpPr>
+          <p:cNvPr id="10" name="Straight Connector 25"/>
+          <p:cNvCxnSpPr/>
+          <p:nvPr/>
+        </p:nvCxnSpPr>
+        <p:spPr>
+          <a:xfrm flipH="1">
+            <a:off x="936255" y="1972244"/>
+            <a:ext cx="2100" cy="0"/>
+          </a:xfrm>
+          <a:prstGeom prst="line">
+            <a:avLst/>
+          </a:prstGeom>
+        </p:spPr>
+        <p:style>
+          <a:lnRef idx="1">
+            <a:schemeClr val="accent1"/>
+          </a:lnRef>
+          <a:fillRef idx="0">
+            <a:schemeClr val="accent1"/>
+          </a:fillRef>
+          <a:effectRef idx="0">
+            <a:schemeClr val="accent1"/>
+          </a:effectRef>
+          <a:fontRef idx="minor">
+            <a:schemeClr val="tx1"/>
+          </a:fontRef>
+        </p:style>
+      </p:cxnSp>
+      <p:pic>
+        <p:nvPicPr>
+          <p:cNvPr id="11" name="Picture 35" descr="Crazy symbol imágenes de stock de arte vectorial | Depositphotos"/>
+          <p:cNvPicPr>
+            <a:picLocks noChangeAspect="1" noChangeArrowheads="1"/>
+          </p:cNvPicPr>
+          <p:nvPr/>
+        </p:nvPicPr>
+        <p:blipFill>
+          <a:blip r:embed="rId2" cstate="print">
+            <a:extLst>
+              <a:ext uri="{28A0092B-C50C-407E-A947-70E740481C1C}">
+                <a14:useLocalDpi xmlns:a14="http://schemas.microsoft.com/office/drawing/2010/main" val="0"/>
+              </a:ext>
+            </a:extLst>
+          </a:blip>
+          <a:srcRect l="14975" t="8802" r="17584" b="15007"/>
+          <a:stretch>
+            <a:fillRect/>
+          </a:stretch>
+        </p:blipFill>
+        <p:spPr bwMode="auto">
+          <a:xfrm>
+            <a:off x="4767522" y="1095762"/>
+            <a:ext cx="335744" cy="352659"/>
+          </a:xfrm>
+          <a:custGeom>
+            <a:avLst/>
+            <a:gdLst>
+              <a:gd name="connsiteX0" fmla="*/ 700184 w 1400368"/>
+              <a:gd name="connsiteY0" fmla="*/ 0 h 1676400"/>
+              <a:gd name="connsiteX1" fmla="*/ 1400368 w 1400368"/>
+              <a:gd name="connsiteY1" fmla="*/ 838200 h 1676400"/>
+              <a:gd name="connsiteX2" fmla="*/ 700184 w 1400368"/>
+              <a:gd name="connsiteY2" fmla="*/ 1676400 h 1676400"/>
+              <a:gd name="connsiteX3" fmla="*/ 0 w 1400368"/>
+              <a:gd name="connsiteY3" fmla="*/ 838200 h 1676400"/>
+              <a:gd name="connsiteX4" fmla="*/ 700184 w 1400368"/>
+              <a:gd name="connsiteY4" fmla="*/ 0 h 1676400"/>
+            </a:gdLst>
+            <a:ahLst/>
+            <a:cxnLst>
+              <a:cxn ang="0">
+                <a:pos x="connsiteX0" y="connsiteY0"/>
+              </a:cxn>
+              <a:cxn ang="0">
+                <a:pos x="connsiteX1" y="connsiteY1"/>
+              </a:cxn>
+              <a:cxn ang="0">
+                <a:pos x="connsiteX2" y="connsiteY2"/>
+              </a:cxn>
+              <a:cxn ang="0">
+                <a:pos x="connsiteX3" y="connsiteY3"/>
+              </a:cxn>
+              <a:cxn ang="0">
+                <a:pos x="connsiteX4" y="connsiteY4"/>
+              </a:cxn>
+            </a:cxnLst>
+            <a:rect l="l" t="t" r="r" b="b"/>
+            <a:pathLst>
+              <a:path w="1400368" h="1676400">
+                <a:moveTo>
+                  <a:pt x="700184" y="0"/>
+                </a:moveTo>
+                <a:cubicBezTo>
+                  <a:pt x="1086885" y="0"/>
+                  <a:pt x="1400368" y="375275"/>
+                  <a:pt x="1400368" y="838200"/>
+                </a:cubicBezTo>
+                <a:cubicBezTo>
+                  <a:pt x="1400368" y="1301125"/>
+                  <a:pt x="1086885" y="1676400"/>
+                  <a:pt x="700184" y="1676400"/>
+                </a:cubicBezTo>
+                <a:cubicBezTo>
+                  <a:pt x="313483" y="1676400"/>
+                  <a:pt x="0" y="1301125"/>
+                  <a:pt x="0" y="838200"/>
+                </a:cubicBezTo>
+                <a:cubicBezTo>
+                  <a:pt x="0" y="375275"/>
+                  <a:pt x="313483" y="0"/>
+                  <a:pt x="700184" y="0"/>
+                </a:cubicBezTo>
+                <a:close/>
+              </a:path>
+            </a:pathLst>
+          </a:custGeom>
+          <a:noFill/>
+          <a:extLst>
+            <a:ext uri="{909E8E84-426E-40DD-AFC4-6F175D3DCCD1}">
+              <a14:hiddenFill xmlns:a14="http://schemas.microsoft.com/office/drawing/2010/main">
+                <a:solidFill>
+                  <a:srgbClr val="FFFFFF"/>
+                </a:solidFill>
+              </a14:hiddenFill>
+            </a:ext>
+          </a:extLst>
+        </p:spPr>
+      </p:pic>
+      <p:pic>
+        <p:nvPicPr>
+          <p:cNvPr id="12" name="Picture 53" descr="Crazy symbol imágenes de stock de arte vectorial | Depositphotos"/>
+          <p:cNvPicPr>
+            <a:picLocks noChangeAspect="1" noChangeArrowheads="1"/>
+          </p:cNvPicPr>
+          <p:nvPr/>
+        </p:nvPicPr>
+        <p:blipFill>
+          <a:blip r:embed="rId2" cstate="print">
+            <a:extLst>
+              <a:ext uri="{28A0092B-C50C-407E-A947-70E740481C1C}">
+                <a14:useLocalDpi xmlns:a14="http://schemas.microsoft.com/office/drawing/2010/main" val="0"/>
+              </a:ext>
+            </a:extLst>
+          </a:blip>
+          <a:srcRect l="14975" t="8802" r="17584" b="15007"/>
+          <a:stretch>
+            <a:fillRect/>
+          </a:stretch>
+        </p:blipFill>
+        <p:spPr bwMode="auto">
+          <a:xfrm>
+            <a:off x="4038465" y="2000141"/>
+            <a:ext cx="335744" cy="352659"/>
+          </a:xfrm>
+          <a:custGeom>
+            <a:avLst/>
+            <a:gdLst>
+              <a:gd name="connsiteX0" fmla="*/ 700184 w 1400368"/>
+              <a:gd name="connsiteY0" fmla="*/ 0 h 1676400"/>
+              <a:gd name="connsiteX1" fmla="*/ 1400368 w 1400368"/>
+              <a:gd name="connsiteY1" fmla="*/ 838200 h 1676400"/>
+              <a:gd name="connsiteX2" fmla="*/ 700184 w 1400368"/>
+              <a:gd name="connsiteY2" fmla="*/ 1676400 h 1676400"/>
+              <a:gd name="connsiteX3" fmla="*/ 0 w 1400368"/>
+              <a:gd name="connsiteY3" fmla="*/ 838200 h 1676400"/>
+              <a:gd name="connsiteX4" fmla="*/ 700184 w 1400368"/>
+              <a:gd name="connsiteY4" fmla="*/ 0 h 1676400"/>
+            </a:gdLst>
+            <a:ahLst/>
+            <a:cxnLst>
+              <a:cxn ang="0">
+                <a:pos x="connsiteX0" y="connsiteY0"/>
+              </a:cxn>
+              <a:cxn ang="0">
+                <a:pos x="connsiteX1" y="connsiteY1"/>
+              </a:cxn>
+              <a:cxn ang="0">
+                <a:pos x="connsiteX2" y="connsiteY2"/>
+              </a:cxn>
+              <a:cxn ang="0">
+                <a:pos x="connsiteX3" y="connsiteY3"/>
+              </a:cxn>
+              <a:cxn ang="0">
+                <a:pos x="connsiteX4" y="connsiteY4"/>
+              </a:cxn>
+            </a:cxnLst>
+            <a:rect l="l" t="t" r="r" b="b"/>
+            <a:pathLst>
+              <a:path w="1400368" h="1676400">
+                <a:moveTo>
+                  <a:pt x="700184" y="0"/>
+                </a:moveTo>
+                <a:cubicBezTo>
+                  <a:pt x="1086885" y="0"/>
+                  <a:pt x="1400368" y="375275"/>
+                  <a:pt x="1400368" y="838200"/>
+                </a:cubicBezTo>
+                <a:cubicBezTo>
+                  <a:pt x="1400368" y="1301125"/>
+                  <a:pt x="1086885" y="1676400"/>
+                  <a:pt x="700184" y="1676400"/>
+                </a:cubicBezTo>
+                <a:cubicBezTo>
+                  <a:pt x="313483" y="1676400"/>
+                  <a:pt x="0" y="1301125"/>
+                  <a:pt x="0" y="838200"/>
+                </a:cubicBezTo>
+                <a:cubicBezTo>
+                  <a:pt x="0" y="375275"/>
+                  <a:pt x="313483" y="0"/>
+                  <a:pt x="700184" y="0"/>
+                </a:cubicBezTo>
+                <a:close/>
+              </a:path>
+            </a:pathLst>
+          </a:custGeom>
+          <a:noFill/>
+          <a:extLst>
+            <a:ext uri="{909E8E84-426E-40DD-AFC4-6F175D3DCCD1}">
+              <a14:hiddenFill xmlns:a14="http://schemas.microsoft.com/office/drawing/2010/main">
+                <a:solidFill>
+                  <a:srgbClr val="FFFFFF"/>
+                </a:solidFill>
+              </a14:hiddenFill>
+            </a:ext>
+          </a:extLst>
+        </p:spPr>
+      </p:pic>
+      <p:sp>
+        <p:nvSpPr>
+          <p:cNvPr id="13" name="TextBox 67"/>
+          <p:cNvSpPr txBox="1"/>
+          <p:nvPr/>
+        </p:nvSpPr>
+        <p:spPr>
+          <a:xfrm>
+            <a:off x="3669794" y="1491691"/>
+            <a:ext cx="1142805" cy="369332"/>
+          </a:xfrm>
+          <a:prstGeom prst="rect">
+            <a:avLst/>
+          </a:prstGeom>
+          <a:noFill/>
+        </p:spPr>
+        <p:txBody>
+          <a:bodyPr wrap="square" rtlCol="0">
+            <a:spAutoFit/>
+          </a:bodyPr>
+          <a:lstStyle/>
+          <a:p>
+            <a:r>
+              <a:rPr lang="en-AU" b="1" dirty="0">
+                <a:solidFill>
+                  <a:srgbClr val="C00000"/>
+                </a:solidFill>
+              </a:rPr>
+              <a:t>Psychosis</a:t>
+            </a:r>
+          </a:p>
+        </p:txBody>
+      </p:sp>
+      <p:sp>
+        <p:nvSpPr>
+          <p:cNvPr id="14" name="Rectángulo: esquinas redondeadas 1">
+            <a:extLst>
+              <a:ext uri="{FF2B5EF4-FFF2-40B4-BE49-F238E27FC236}">
+                <a16:creationId xmlns:a16="http://schemas.microsoft.com/office/drawing/2014/main" id="{A04DDA6C-336C-9838-DCF9-C6858B1D8DAA}"/>
+              </a:ext>
+            </a:extLst>
+          </p:cNvPr>
+          <p:cNvSpPr/>
+          <p:nvPr/>
+        </p:nvSpPr>
+        <p:spPr>
+          <a:xfrm>
+            <a:off x="8620882" y="1375570"/>
+            <a:ext cx="3384053" cy="817214"/>
+          </a:xfrm>
+          <a:prstGeom prst="roundRect">
+            <a:avLst>
+              <a:gd name="adj" fmla="val 0"/>
+            </a:avLst>
+          </a:prstGeom>
+          <a:solidFill>
+            <a:schemeClr val="bg1"/>
+          </a:solidFill>
+          <a:ln>
+            <a:solidFill>
+              <a:schemeClr val="tx1"/>
+            </a:solidFill>
+          </a:ln>
+        </p:spPr>
+        <p:style>
+          <a:lnRef idx="2">
+            <a:schemeClr val="accent1">
+              <a:shade val="15000"/>
+            </a:schemeClr>
+          </a:lnRef>
+          <a:fillRef idx="1">
+            <a:schemeClr val="accent1"/>
+          </a:fillRef>
+          <a:effectRef idx="0">
+            <a:schemeClr val="accent1"/>
+          </a:effectRef>
+          <a:fontRef idx="minor">
+            <a:schemeClr val="lt1"/>
+          </a:fontRef>
+        </p:style>
+        <p:txBody>
+          <a:bodyPr rtlCol="0" anchor="t"/>
+          <a:lstStyle/>
+          <a:p>
+            <a:pPr algn="ctr">
+              <a:lnSpc>
+                <a:spcPct val="150000"/>
+              </a:lnSpc>
+            </a:pPr>
+            <a:r>
+              <a:rPr lang="es-ES" sz="2800" b="1" dirty="0">
+                <a:solidFill>
+                  <a:schemeClr val="tx1"/>
+                </a:solidFill>
+              </a:rPr>
+              <a:t>Heritability: 80</a:t>
+            </a:r>
+            <a:r>
+              <a:rPr lang="es-ES" sz="2800" b="1" dirty="0" smtClean="0">
+                <a:solidFill>
+                  <a:schemeClr val="tx1"/>
+                </a:solidFill>
+              </a:rPr>
+              <a:t>%</a:t>
+            </a:r>
+            <a:endParaRPr lang="es-ES" sz="2800" b="1" dirty="0">
+              <a:solidFill>
+                <a:schemeClr val="tx1"/>
+              </a:solidFill>
+            </a:endParaRPr>
+          </a:p>
+        </p:txBody>
+      </p:sp>
+    </p:spTree>
+    <p:extLst>
+      <p:ext uri="{BB962C8B-B14F-4D97-AF65-F5344CB8AC3E}">
+        <p14:creationId xmlns:p14="http://schemas.microsoft.com/office/powerpoint/2010/main" val="17573306"/>
+      </p:ext>
+    </p:extLst>
+  </p:cSld>
+  <p:clrMapOvr>
+    <a:masterClrMapping/>
+  </p:clrMapOvr>
+  <p:timing>
+    <p:tnLst>
+      <p:par>
+        <p:cTn id="1" dur="indefinite" restart="never" nodeType="tmRoot"/>
+      </p:par>
+    </p:tnLst>
+  </p:timing>
+</p:sld>
+</file>
+
+<file path=ppt/slides/slide3.xml><?xml version="1.0" encoding="utf-8"?>
+<p:sld xmlns:a="http://schemas.openxmlformats.org/drawingml/2006/main" xmlns:r="http://schemas.openxmlformats.org/officeDocument/2006/relationships" xmlns:p="http://schemas.openxmlformats.org/presentationml/2006/main">
+  <p:cSld>
+    <p:spTree>
+      <p:nvGrpSpPr>
+        <p:cNvPr id="1" name=""/>
+        <p:cNvGrpSpPr/>
+        <p:nvPr/>
+      </p:nvGrpSpPr>
+      <p:grpSpPr>
+        <a:xfrm>
+          <a:off x="0" y="0"/>
+          <a:ext cx="0" cy="0"/>
+          <a:chOff x="0" y="0"/>
+          <a:chExt cx="0" cy="0"/>
+        </a:xfrm>
+      </p:grpSpPr>
+      <p:sp>
+        <p:nvSpPr>
+          <p:cNvPr id="2" name="Título 1"/>
+          <p:cNvSpPr>
+            <a:spLocks noGrp="1"/>
+          </p:cNvSpPr>
+          <p:nvPr>
+            <p:ph type="title"/>
+          </p:nvPr>
+        </p:nvSpPr>
+        <p:spPr>
+          <a:xfrm>
+            <a:off x="0" y="0"/>
+            <a:ext cx="12192000" cy="1325563"/>
+          </a:xfrm>
+        </p:spPr>
+        <p:txBody>
+          <a:bodyPr>
+            <a:normAutofit/>
+          </a:bodyPr>
+          <a:lstStyle/>
+          <a:p>
+            <a:pPr algn="ctr"/>
+            <a:r>
+              <a:rPr lang="es-ES" sz="4000" b="1" dirty="0" err="1" smtClean="0"/>
+              <a:t>Handedness</a:t>
+            </a:r>
+            <a:r>
+              <a:rPr lang="es-ES" sz="4000" b="1" dirty="0" smtClean="0"/>
+              <a:t> in </a:t>
+            </a:r>
+            <a:r>
+              <a:rPr lang="es-ES" sz="4000" b="1" dirty="0" err="1" smtClean="0"/>
+              <a:t>neurodevelopmental</a:t>
+            </a:r>
+            <a:r>
+              <a:rPr lang="es-ES" sz="4000" b="1" dirty="0" smtClean="0"/>
+              <a:t>/</a:t>
+            </a:r>
+            <a:r>
+              <a:rPr lang="es-ES" sz="4000" b="1" dirty="0" err="1" smtClean="0"/>
+              <a:t>psychiatric</a:t>
+            </a:r>
+            <a:r>
+              <a:rPr lang="es-ES" sz="4000" b="1" dirty="0" smtClean="0"/>
+              <a:t> disorders</a:t>
+            </a:r>
+            <a:endParaRPr lang="en-GB" sz="4000" b="1" dirty="0"/>
+          </a:p>
+        </p:txBody>
+      </p:sp>
+      <p:pic>
+        <p:nvPicPr>
+          <p:cNvPr id="4" name="Google Shape;76;p15"/>
+          <p:cNvPicPr preferRelativeResize="0"/>
+          <p:nvPr/>
+        </p:nvPicPr>
+        <p:blipFill rotWithShape="1">
+          <a:blip r:embed="rId2">
+            <a:alphaModFix/>
+          </a:blip>
+          <a:srcRect l="25345" t="5525" b="11274"/>
+          <a:stretch/>
+        </p:blipFill>
+        <p:spPr>
+          <a:xfrm>
+            <a:off x="258618" y="1078972"/>
+            <a:ext cx="4922982" cy="4483628"/>
+          </a:xfrm>
+          <a:prstGeom prst="rect">
+            <a:avLst/>
+          </a:prstGeom>
+          <a:noFill/>
+          <a:ln>
+            <a:noFill/>
+          </a:ln>
+        </p:spPr>
+      </p:pic>
+      <p:sp>
+        <p:nvSpPr>
+          <p:cNvPr id="5" name="CuadroTexto 4"/>
+          <p:cNvSpPr txBox="1"/>
+          <p:nvPr/>
+        </p:nvSpPr>
+        <p:spPr>
+          <a:xfrm>
+            <a:off x="258618" y="5631767"/>
+            <a:ext cx="4618181" cy="954107"/>
+          </a:xfrm>
+          <a:prstGeom prst="rect">
+            <a:avLst/>
+          </a:prstGeom>
+          <a:noFill/>
+        </p:spPr>
+        <p:txBody>
+          <a:bodyPr wrap="square" rtlCol="0">
+            <a:spAutoFit/>
+          </a:bodyPr>
+          <a:lstStyle/>
+          <a:p>
+            <a:pPr algn="ctr"/>
+            <a:r>
+              <a:rPr lang="es-ES" sz="2800" b="1" dirty="0" smtClean="0"/>
+              <a:t>High </a:t>
+            </a:r>
+            <a:r>
+              <a:rPr lang="es-ES" sz="2800" b="1" u="sng" dirty="0" smtClean="0">
+                <a:uFill>
+                  <a:solidFill>
+                    <a:srgbClr val="FF0000"/>
+                  </a:solidFill>
+                </a:uFill>
+              </a:rPr>
+              <a:t>genetic</a:t>
+            </a:r>
+            <a:r>
+              <a:rPr lang="es-ES" sz="2800" b="1" dirty="0" smtClean="0"/>
+              <a:t> + </a:t>
+            </a:r>
+            <a:r>
+              <a:rPr lang="es-ES" sz="2800" b="1" u="sng" dirty="0" smtClean="0">
+                <a:uFill>
+                  <a:solidFill>
+                    <a:schemeClr val="accent1"/>
+                  </a:solidFill>
+                </a:uFill>
+              </a:rPr>
+              <a:t>clinical</a:t>
+            </a:r>
+            <a:r>
+              <a:rPr lang="es-ES" sz="2800" b="1" dirty="0" smtClean="0"/>
+              <a:t> overlap in mental disorders</a:t>
+            </a:r>
+          </a:p>
+        </p:txBody>
+      </p:sp>
+      <p:sp>
+        <p:nvSpPr>
+          <p:cNvPr id="7" name="CuadroTexto 6">
+            <a:extLst>
+              <a:ext uri="{FF2B5EF4-FFF2-40B4-BE49-F238E27FC236}">
+                <a16:creationId xmlns:a16="http://schemas.microsoft.com/office/drawing/2014/main" id="{39AC7DFD-5540-8C9B-D578-4C74605103ED}"/>
+              </a:ext>
+            </a:extLst>
+          </p:cNvPr>
+          <p:cNvSpPr txBox="1"/>
+          <p:nvPr/>
+        </p:nvSpPr>
+        <p:spPr>
+          <a:xfrm>
+            <a:off x="5623623" y="4918645"/>
+            <a:ext cx="2508912" cy="1015663"/>
+          </a:xfrm>
+          <a:prstGeom prst="rect">
+            <a:avLst/>
+          </a:prstGeom>
+          <a:noFill/>
+          <a:ln>
+            <a:solidFill>
+              <a:schemeClr val="tx1"/>
+            </a:solidFill>
+          </a:ln>
+        </p:spPr>
+        <p:txBody>
+          <a:bodyPr wrap="square" rtlCol="0">
+            <a:spAutoFit/>
+          </a:bodyPr>
+          <a:lstStyle/>
+          <a:p>
+            <a:pPr algn="ctr"/>
+            <a:r>
+              <a:rPr lang="es-ES" sz="2000" b="1" dirty="0"/>
+              <a:t>Schizophrenia </a:t>
+            </a:r>
+            <a:r>
+              <a:rPr lang="es-ES" sz="2000" dirty="0"/>
+              <a:t>(SCZ)</a:t>
+            </a:r>
+          </a:p>
+          <a:p>
+            <a:pPr algn="ctr"/>
+            <a:r>
+              <a:rPr lang="es-ES" sz="2000" dirty="0"/>
+              <a:t>Left-</a:t>
+            </a:r>
+            <a:r>
+              <a:rPr lang="en-US" sz="2000" noProof="0" dirty="0"/>
+              <a:t>handed</a:t>
+            </a:r>
+            <a:r>
+              <a:rPr lang="es-ES" sz="2000" dirty="0"/>
+              <a:t>: ~20%</a:t>
+            </a:r>
+          </a:p>
+          <a:p>
+            <a:pPr algn="ctr"/>
+            <a:r>
+              <a:rPr lang="es-ES" sz="2000" dirty="0"/>
+              <a:t>NRH: ~35%</a:t>
+            </a:r>
+            <a:r>
+              <a:rPr lang="es-ES" sz="2000" b="1" dirty="0"/>
+              <a:t>**</a:t>
+            </a:r>
+          </a:p>
+        </p:txBody>
+      </p:sp>
+      <p:sp>
+        <p:nvSpPr>
+          <p:cNvPr id="8" name="CuadroTexto 7">
+            <a:extLst>
+              <a:ext uri="{FF2B5EF4-FFF2-40B4-BE49-F238E27FC236}">
+                <a16:creationId xmlns:a16="http://schemas.microsoft.com/office/drawing/2014/main" id="{F5D3924B-DEC9-564D-4C1E-F41BB1233C68}"/>
+              </a:ext>
+            </a:extLst>
+          </p:cNvPr>
+          <p:cNvSpPr txBox="1"/>
+          <p:nvPr/>
+        </p:nvSpPr>
+        <p:spPr>
+          <a:xfrm>
+            <a:off x="9067648" y="4273799"/>
+            <a:ext cx="2447221" cy="707886"/>
+          </a:xfrm>
+          <a:prstGeom prst="rect">
+            <a:avLst/>
+          </a:prstGeom>
+          <a:noFill/>
+          <a:ln w="57150">
+            <a:solidFill>
+              <a:srgbClr val="FF0000"/>
+            </a:solidFill>
+          </a:ln>
+        </p:spPr>
+        <p:txBody>
+          <a:bodyPr wrap="square" rtlCol="0">
+            <a:spAutoFit/>
+          </a:bodyPr>
+          <a:lstStyle/>
+          <a:p>
+            <a:pPr algn="ctr"/>
+            <a:r>
+              <a:rPr lang="es-ES" sz="2000" b="1" dirty="0"/>
+              <a:t>Bipolar disorder </a:t>
+            </a:r>
+            <a:r>
+              <a:rPr lang="es-ES" sz="2000" dirty="0"/>
+              <a:t>(BD)</a:t>
+            </a:r>
+          </a:p>
+          <a:p>
+            <a:pPr algn="ctr"/>
+            <a:r>
+              <a:rPr lang="es-ES" sz="2000" dirty="0"/>
+              <a:t>???</a:t>
+            </a:r>
+          </a:p>
+        </p:txBody>
+      </p:sp>
+      <p:sp>
+        <p:nvSpPr>
+          <p:cNvPr id="9" name="CuadroTexto 8">
+            <a:extLst>
+              <a:ext uri="{FF2B5EF4-FFF2-40B4-BE49-F238E27FC236}">
+                <a16:creationId xmlns:a16="http://schemas.microsoft.com/office/drawing/2014/main" id="{0B208FE0-A252-3BEE-7248-5F6ECD1E8CE2}"/>
+              </a:ext>
+            </a:extLst>
+          </p:cNvPr>
+          <p:cNvSpPr txBox="1"/>
+          <p:nvPr/>
+        </p:nvSpPr>
+        <p:spPr>
+          <a:xfrm>
+            <a:off x="9180170" y="3161344"/>
+            <a:ext cx="2222173" cy="646331"/>
+          </a:xfrm>
+          <a:prstGeom prst="rect">
+            <a:avLst/>
+          </a:prstGeom>
+          <a:noFill/>
+        </p:spPr>
+        <p:txBody>
+          <a:bodyPr wrap="square" rtlCol="0">
+            <a:spAutoFit/>
+          </a:bodyPr>
+          <a:lstStyle/>
+          <a:p>
+            <a:pPr algn="ctr"/>
+            <a:r>
+              <a:rPr lang="es-ES" b="1" dirty="0"/>
+              <a:t>Depression</a:t>
+            </a:r>
+            <a:r>
+              <a:rPr lang="es-ES" dirty="0"/>
+              <a:t> (DEP)</a:t>
+            </a:r>
+          </a:p>
+          <a:p>
+            <a:pPr algn="ctr"/>
+            <a:r>
+              <a:rPr lang="es-ES" dirty="0"/>
+              <a:t>NRH: 18</a:t>
+            </a:r>
+            <a:r>
+              <a:rPr lang="es-ES" dirty="0" smtClean="0"/>
+              <a:t>%</a:t>
+            </a:r>
+            <a:endParaRPr lang="es-ES" dirty="0"/>
+          </a:p>
+        </p:txBody>
+      </p:sp>
+      <p:sp>
+        <p:nvSpPr>
+          <p:cNvPr id="10" name="CuadroTexto 9">
+            <a:extLst>
+              <a:ext uri="{FF2B5EF4-FFF2-40B4-BE49-F238E27FC236}">
+                <a16:creationId xmlns:a16="http://schemas.microsoft.com/office/drawing/2014/main" id="{5AB82C21-CFEB-F5F2-0204-426DA9DE4F6F}"/>
+              </a:ext>
+            </a:extLst>
+          </p:cNvPr>
+          <p:cNvSpPr txBox="1"/>
+          <p:nvPr/>
+        </p:nvSpPr>
+        <p:spPr>
+          <a:xfrm>
+            <a:off x="5791436" y="3764137"/>
+            <a:ext cx="2173286" cy="646331"/>
+          </a:xfrm>
+          <a:prstGeom prst="rect">
+            <a:avLst/>
+          </a:prstGeom>
+          <a:noFill/>
+        </p:spPr>
+        <p:txBody>
+          <a:bodyPr wrap="square" rtlCol="0">
+            <a:spAutoFit/>
+          </a:bodyPr>
+          <a:lstStyle/>
+          <a:p>
+            <a:pPr algn="ctr"/>
+            <a:r>
+              <a:rPr lang="es-ES" b="1" dirty="0"/>
+              <a:t>Autism </a:t>
+            </a:r>
+            <a:r>
+              <a:rPr lang="es-ES" dirty="0"/>
+              <a:t>(ASD)</a:t>
+            </a:r>
+          </a:p>
+          <a:p>
+            <a:pPr algn="ctr"/>
+            <a:r>
+              <a:rPr lang="es-ES" dirty="0"/>
+              <a:t>NRH: ~35</a:t>
+            </a:r>
+            <a:r>
+              <a:rPr lang="es-ES" dirty="0" smtClean="0"/>
+              <a:t>%</a:t>
+            </a:r>
+            <a:r>
+              <a:rPr lang="es-ES" b="1" dirty="0" smtClean="0"/>
+              <a:t>**</a:t>
+            </a:r>
+            <a:endParaRPr lang="es-ES" b="1" dirty="0"/>
+          </a:p>
+        </p:txBody>
+      </p:sp>
+      <p:sp>
+        <p:nvSpPr>
+          <p:cNvPr id="11" name="CuadroTexto 10">
+            <a:extLst>
+              <a:ext uri="{FF2B5EF4-FFF2-40B4-BE49-F238E27FC236}">
+                <a16:creationId xmlns:a16="http://schemas.microsoft.com/office/drawing/2014/main" id="{DD7F7974-D189-5E3B-3511-1044205A7774}"/>
+              </a:ext>
+            </a:extLst>
+          </p:cNvPr>
+          <p:cNvSpPr txBox="1"/>
+          <p:nvPr/>
+        </p:nvSpPr>
+        <p:spPr>
+          <a:xfrm>
+            <a:off x="5927845" y="2923450"/>
+            <a:ext cx="1900468" cy="646331"/>
+          </a:xfrm>
+          <a:prstGeom prst="rect">
+            <a:avLst/>
+          </a:prstGeom>
+          <a:noFill/>
+        </p:spPr>
+        <p:txBody>
+          <a:bodyPr wrap="square" rtlCol="0">
+            <a:spAutoFit/>
+          </a:bodyPr>
+          <a:lstStyle/>
+          <a:p>
+            <a:pPr algn="ctr"/>
+            <a:r>
+              <a:rPr lang="es-ES" b="1" dirty="0"/>
+              <a:t>ADHD</a:t>
+            </a:r>
+          </a:p>
+          <a:p>
+            <a:pPr algn="ctr"/>
+            <a:r>
+              <a:rPr lang="es-ES" dirty="0"/>
+              <a:t>NRH: ~25%</a:t>
+            </a:r>
+            <a:r>
+              <a:rPr lang="es-ES" b="1" dirty="0"/>
+              <a:t>*</a:t>
+            </a:r>
+          </a:p>
+        </p:txBody>
+      </p:sp>
+      <p:sp>
+        <p:nvSpPr>
+          <p:cNvPr id="12" name="CuadroTexto 11">
+            <a:extLst>
+              <a:ext uri="{FF2B5EF4-FFF2-40B4-BE49-F238E27FC236}">
+                <a16:creationId xmlns:a16="http://schemas.microsoft.com/office/drawing/2014/main" id="{2D0DFF0B-E50B-06BF-66F5-31A1A2654E16}"/>
+              </a:ext>
+            </a:extLst>
+          </p:cNvPr>
+          <p:cNvSpPr txBox="1"/>
+          <p:nvPr/>
+        </p:nvSpPr>
+        <p:spPr>
+          <a:xfrm>
+            <a:off x="8990723" y="5241811"/>
+            <a:ext cx="2601069" cy="1200329"/>
+          </a:xfrm>
+          <a:prstGeom prst="rect">
+            <a:avLst/>
+          </a:prstGeom>
+          <a:solidFill>
+            <a:schemeClr val="bg1">
+              <a:lumMod val="95000"/>
+            </a:schemeClr>
+          </a:solidFill>
+        </p:spPr>
+        <p:txBody>
+          <a:bodyPr wrap="square" rtlCol="0">
+            <a:spAutoFit/>
+          </a:bodyPr>
+          <a:lstStyle/>
+          <a:p>
+            <a:r>
+              <a:rPr lang="es-ES" sz="1800" u="sng" dirty="0"/>
+              <a:t>No concordant pattern:</a:t>
+            </a:r>
+          </a:p>
+          <a:p>
+            <a:r>
+              <a:rPr lang="es-ES" sz="1800" dirty="0"/>
+              <a:t>Small sample sizes</a:t>
+            </a:r>
+          </a:p>
+          <a:p>
+            <a:r>
+              <a:rPr lang="es-ES" sz="1800" dirty="0"/>
+              <a:t>Lack of clinical data</a:t>
+            </a:r>
+          </a:p>
+          <a:p>
+            <a:r>
+              <a:rPr lang="es-ES" sz="1800" dirty="0"/>
+              <a:t>Diverse measurements</a:t>
+            </a:r>
+          </a:p>
+        </p:txBody>
+      </p:sp>
+      <p:sp>
+        <p:nvSpPr>
+          <p:cNvPr id="3" name="CuadroTexto 2"/>
+          <p:cNvSpPr txBox="1"/>
+          <p:nvPr/>
+        </p:nvSpPr>
+        <p:spPr>
+          <a:xfrm>
+            <a:off x="6111212" y="1746093"/>
+            <a:ext cx="5151175" cy="830997"/>
+          </a:xfrm>
+          <a:prstGeom prst="rect">
+            <a:avLst/>
+          </a:prstGeom>
+          <a:solidFill>
+            <a:schemeClr val="accent4">
+              <a:lumMod val="20000"/>
+              <a:lumOff val="80000"/>
+            </a:schemeClr>
+          </a:solidFill>
+        </p:spPr>
+        <p:txBody>
+          <a:bodyPr wrap="square" rtlCol="0">
+            <a:spAutoFit/>
+          </a:bodyPr>
+          <a:lstStyle/>
+          <a:p>
+            <a:pPr algn="ctr"/>
+            <a:r>
+              <a:rPr lang="es-ES" sz="2400" b="1" dirty="0" smtClean="0"/>
+              <a:t>&gt; NRH in disorders </a:t>
+            </a:r>
+            <a:r>
+              <a:rPr lang="es-ES" sz="2400" b="1" dirty="0" err="1" smtClean="0"/>
+              <a:t>with</a:t>
+            </a:r>
+            <a:r>
+              <a:rPr lang="es-ES" sz="2400" b="1" dirty="0" smtClean="0"/>
+              <a:t> </a:t>
+            </a:r>
+            <a:r>
+              <a:rPr lang="es-ES" sz="2400" b="1" dirty="0" err="1" smtClean="0"/>
+              <a:t>early</a:t>
+            </a:r>
+            <a:r>
+              <a:rPr lang="es-ES" sz="2400" b="1" dirty="0" smtClean="0"/>
+              <a:t> </a:t>
+            </a:r>
+            <a:r>
+              <a:rPr lang="es-ES" sz="2400" b="1" dirty="0" err="1" smtClean="0"/>
+              <a:t>age</a:t>
+            </a:r>
+            <a:r>
+              <a:rPr lang="es-ES" sz="2400" b="1" dirty="0" smtClean="0"/>
+              <a:t> of </a:t>
+            </a:r>
+            <a:r>
+              <a:rPr lang="es-ES" sz="2400" b="1" dirty="0" err="1" smtClean="0"/>
+              <a:t>onset</a:t>
+            </a:r>
+            <a:r>
+              <a:rPr lang="es-ES" sz="2400" b="1" dirty="0" smtClean="0"/>
+              <a:t> and more </a:t>
+            </a:r>
+            <a:r>
+              <a:rPr lang="es-ES" sz="2400" b="1" dirty="0" err="1" smtClean="0"/>
+              <a:t>prevalence</a:t>
+            </a:r>
+            <a:r>
+              <a:rPr lang="es-ES" sz="2400" b="1" dirty="0" smtClean="0"/>
+              <a:t> in males</a:t>
+            </a:r>
+            <a:endParaRPr lang="en-GB" sz="2400" b="1" dirty="0"/>
+          </a:p>
+        </p:txBody>
+      </p:sp>
+    </p:spTree>
+    <p:extLst>
+      <p:ext uri="{BB962C8B-B14F-4D97-AF65-F5344CB8AC3E}">
+        <p14:creationId xmlns:p14="http://schemas.microsoft.com/office/powerpoint/2010/main" val="3899370187"/>
+      </p:ext>
+    </p:extLst>
+  </p:cSld>
+  <p:clrMapOvr>
+    <a:masterClrMapping/>
+  </p:clrMapOvr>
+  <p:timing>
+    <p:tnLst>
+      <p:par>
+        <p:cTn id="1" dur="indefinite" restart="never" nodeType="tmRoot">
+          <p:childTnLst>
+            <p:seq concurrent="1" nextAc="seek">
+              <p:cTn id="2" dur="indefinite" nodeType="mainSeq">
+                <p:childTnLst>
+                  <p:par>
+                    <p:cTn id="3" fill="hold">
+                      <p:stCondLst>
+                        <p:cond delay="indefinite"/>
+                      </p:stCondLst>
+                      <p:childTnLst>
+                        <p:par>
+                          <p:cTn id="4" fill="hold">
+                            <p:stCondLst>
+                              <p:cond delay="0"/>
+                            </p:stCondLst>
+                            <p:childTnLst>
+                              <p:par>
+                                <p:cTn id="5" presetID="1" presetClass="entr" presetSubtype="0" fill="hold" grpId="0" nodeType="clickEffect">
+                                  <p:stCondLst>
+                                    <p:cond delay="0"/>
+                                  </p:stCondLst>
+                                  <p:childTnLst>
+                                    <p:set>
+                                      <p:cBhvr>
+                                        <p:cTn id="6" dur="1" fill="hold">
+                                          <p:stCondLst>
+                                            <p:cond delay="0"/>
+                                          </p:stCondLst>
+                                        </p:cTn>
+                                        <p:tgtEl>
+                                          <p:spTgt spid="12"/>
+                                        </p:tgtEl>
+                                        <p:attrNameLst>
+                                          <p:attrName>style.visibility</p:attrName>
+                                        </p:attrNameLst>
+                                      </p:cBhvr>
+                                      <p:to>
+                                        <p:strVal val="visible"/>
+                                      </p:to>
+                                    </p:set>
+                                  </p:childTnLst>
+                                </p:cTn>
+                              </p:par>
+                            </p:childTnLst>
+                          </p:cTn>
+                        </p:par>
+                      </p:childTnLst>
+                    </p:cTn>
+                  </p:par>
+                </p:childTnLst>
+              </p:cTn>
+              <p:prevCondLst>
+                <p:cond evt="onPrev" delay="0">
+                  <p:tgtEl>
+                    <p:sldTgt/>
+                  </p:tgtEl>
+                </p:cond>
+              </p:prevCondLst>
+              <p:nextCondLst>
+                <p:cond evt="onNext" delay="0">
+                  <p:tgtEl>
+                    <p:sldTgt/>
+                  </p:tgtEl>
+                </p:cond>
+              </p:nextCondLst>
+            </p:seq>
+          </p:childTnLst>
+        </p:cTn>
+      </p:par>
+    </p:tnLst>
+    <p:bldLst>
+      <p:bldP spid="12" grpId="0" animBg="1"/>
+    </p:bldLst>
+  </p:timing>
+</p:sld>
+</file>
+
+<file path=ppt/slides/slide4.xml><?xml version="1.0" encoding="utf-8"?>
 <p:sld xmlns:a="http://schemas.openxmlformats.org/drawingml/2006/main" xmlns:r="http://schemas.openxmlformats.org/officeDocument/2006/relationships" xmlns:p="http://schemas.openxmlformats.org/presentationml/2006/main">
   <p:cSld>
     <p:spTree>
@@ -3988,7 +5737,7 @@
 </p:sld>
 </file>
 
-<file path=ppt/slides/slide3.xml><?xml version="1.0" encoding="utf-8"?>
+<file path=ppt/slides/slide5.xml><?xml version="1.0" encoding="utf-8"?>
 <p:sld xmlns:a="http://schemas.openxmlformats.org/drawingml/2006/main" xmlns:r="http://schemas.openxmlformats.org/officeDocument/2006/relationships" xmlns:p="http://schemas.openxmlformats.org/presentationml/2006/main">
   <p:cSld>
     <p:spTree>
@@ -4467,7 +6216,7 @@
         </p:nvGrpSpPr>
         <p:grpSpPr>
           <a:xfrm>
-            <a:off x="205370" y="5863814"/>
+            <a:off x="75940" y="5734376"/>
             <a:ext cx="2717142" cy="880369"/>
             <a:chOff x="0" y="3734287"/>
             <a:chExt cx="2369127" cy="880369"/>
@@ -4591,7 +6340,7 @@
         </p:nvGrpSpPr>
         <p:grpSpPr>
           <a:xfrm>
-            <a:off x="2757187" y="5888500"/>
+            <a:off x="2627757" y="5759062"/>
             <a:ext cx="2174118" cy="830997"/>
             <a:chOff x="2175164" y="3867801"/>
             <a:chExt cx="1669472" cy="830997"/>
@@ -6390,598 +8139,7 @@
 </p:sld>
 </file>
 
-<file path=ppt/slides/slide4.xml><?xml version="1.0" encoding="utf-8"?>
-<p:sld xmlns:a="http://schemas.openxmlformats.org/drawingml/2006/main" xmlns:r="http://schemas.openxmlformats.org/officeDocument/2006/relationships" xmlns:p="http://schemas.openxmlformats.org/presentationml/2006/main">
-  <p:cSld>
-    <p:spTree>
-      <p:nvGrpSpPr>
-        <p:cNvPr id="1" name=""/>
-        <p:cNvGrpSpPr/>
-        <p:nvPr/>
-      </p:nvGrpSpPr>
-      <p:grpSpPr>
-        <a:xfrm>
-          <a:off x="0" y="0"/>
-          <a:ext cx="0" cy="0"/>
-          <a:chOff x="0" y="0"/>
-          <a:chExt cx="0" cy="0"/>
-        </a:xfrm>
-      </p:grpSpPr>
-      <p:sp>
-        <p:nvSpPr>
-          <p:cNvPr id="2" name="Título 1"/>
-          <p:cNvSpPr>
-            <a:spLocks noGrp="1"/>
-          </p:cNvSpPr>
-          <p:nvPr>
-            <p:ph type="title"/>
-          </p:nvPr>
-        </p:nvSpPr>
-        <p:spPr>
-          <a:xfrm>
-            <a:off x="0" y="0"/>
-            <a:ext cx="12192000" cy="1325563"/>
-          </a:xfrm>
-        </p:spPr>
-        <p:txBody>
-          <a:bodyPr>
-            <a:normAutofit/>
-          </a:bodyPr>
-          <a:lstStyle/>
-          <a:p>
-            <a:pPr algn="ctr"/>
-            <a:r>
-              <a:rPr lang="es-ES" sz="4000" b="1" dirty="0" err="1" smtClean="0"/>
-              <a:t>Handedness</a:t>
-            </a:r>
-            <a:r>
-              <a:rPr lang="es-ES" sz="4000" b="1" dirty="0" smtClean="0"/>
-              <a:t> in </a:t>
-            </a:r>
-            <a:r>
-              <a:rPr lang="es-ES" sz="4000" b="1" dirty="0" err="1" smtClean="0"/>
-              <a:t>neurodevelopmental</a:t>
-            </a:r>
-            <a:r>
-              <a:rPr lang="es-ES" sz="4000" b="1" dirty="0" smtClean="0"/>
-              <a:t>/</a:t>
-            </a:r>
-            <a:r>
-              <a:rPr lang="es-ES" sz="4000" b="1" dirty="0" err="1" smtClean="0"/>
-              <a:t>psychiatric</a:t>
-            </a:r>
-            <a:r>
-              <a:rPr lang="es-ES" sz="4000" b="1" dirty="0" smtClean="0"/>
-              <a:t> </a:t>
-            </a:r>
-            <a:r>
-              <a:rPr lang="es-ES" sz="4000" b="1" dirty="0" smtClean="0"/>
-              <a:t>disorders</a:t>
-            </a:r>
-            <a:endParaRPr lang="en-GB" sz="4000" b="1" dirty="0"/>
-          </a:p>
-        </p:txBody>
-      </p:sp>
-      <p:pic>
-        <p:nvPicPr>
-          <p:cNvPr id="4" name="Google Shape;76;p15"/>
-          <p:cNvPicPr preferRelativeResize="0"/>
-          <p:nvPr/>
-        </p:nvPicPr>
-        <p:blipFill rotWithShape="1">
-          <a:blip r:embed="rId2">
-            <a:alphaModFix/>
-          </a:blip>
-          <a:srcRect l="25345" t="5525" b="11274"/>
-          <a:stretch/>
-        </p:blipFill>
-        <p:spPr>
-          <a:xfrm>
-            <a:off x="258618" y="1078972"/>
-            <a:ext cx="4922982" cy="4483628"/>
-          </a:xfrm>
-          <a:prstGeom prst="rect">
-            <a:avLst/>
-          </a:prstGeom>
-          <a:noFill/>
-          <a:ln>
-            <a:noFill/>
-          </a:ln>
-        </p:spPr>
-      </p:pic>
-      <p:sp>
-        <p:nvSpPr>
-          <p:cNvPr id="5" name="CuadroTexto 4"/>
-          <p:cNvSpPr txBox="1"/>
-          <p:nvPr/>
-        </p:nvSpPr>
-        <p:spPr>
-          <a:xfrm>
-            <a:off x="258618" y="5631767"/>
-            <a:ext cx="4618181" cy="954107"/>
-          </a:xfrm>
-          <a:prstGeom prst="rect">
-            <a:avLst/>
-          </a:prstGeom>
-          <a:noFill/>
-        </p:spPr>
-        <p:txBody>
-          <a:bodyPr wrap="square" rtlCol="0">
-            <a:spAutoFit/>
-          </a:bodyPr>
-          <a:lstStyle/>
-          <a:p>
-            <a:pPr algn="ctr"/>
-            <a:r>
-              <a:rPr lang="es-ES" sz="2800" b="1" dirty="0" smtClean="0"/>
-              <a:t>High </a:t>
-            </a:r>
-            <a:r>
-              <a:rPr lang="es-ES" sz="2800" b="1" u="sng" dirty="0" smtClean="0">
-                <a:uFill>
-                  <a:solidFill>
-                    <a:srgbClr val="FF0000"/>
-                  </a:solidFill>
-                </a:uFill>
-              </a:rPr>
-              <a:t>genetic</a:t>
-            </a:r>
-            <a:r>
-              <a:rPr lang="es-ES" sz="2800" b="1" dirty="0" smtClean="0"/>
-              <a:t> + </a:t>
-            </a:r>
-            <a:r>
-              <a:rPr lang="es-ES" sz="2800" b="1" u="sng" dirty="0" smtClean="0">
-                <a:uFill>
-                  <a:solidFill>
-                    <a:schemeClr val="accent1"/>
-                  </a:solidFill>
-                </a:uFill>
-              </a:rPr>
-              <a:t>clinical</a:t>
-            </a:r>
-            <a:r>
-              <a:rPr lang="es-ES" sz="2800" b="1" dirty="0" smtClean="0"/>
-              <a:t> overlap </a:t>
-            </a:r>
-            <a:r>
-              <a:rPr lang="es-ES" sz="2800" b="1" dirty="0" smtClean="0"/>
-              <a:t>in </a:t>
-            </a:r>
-            <a:r>
-              <a:rPr lang="es-ES" sz="2800" b="1" dirty="0" smtClean="0"/>
-              <a:t>mental disorders</a:t>
-            </a:r>
-          </a:p>
-        </p:txBody>
-      </p:sp>
-      <p:sp>
-        <p:nvSpPr>
-          <p:cNvPr id="7" name="CuadroTexto 6">
-            <a:extLst>
-              <a:ext uri="{FF2B5EF4-FFF2-40B4-BE49-F238E27FC236}">
-                <a16:creationId xmlns:a16="http://schemas.microsoft.com/office/drawing/2014/main" id="{39AC7DFD-5540-8C9B-D578-4C74605103ED}"/>
-              </a:ext>
-            </a:extLst>
-          </p:cNvPr>
-          <p:cNvSpPr txBox="1"/>
-          <p:nvPr/>
-        </p:nvSpPr>
-        <p:spPr>
-          <a:xfrm>
-            <a:off x="5623623" y="2859121"/>
-            <a:ext cx="2508912" cy="923330"/>
-          </a:xfrm>
-          <a:prstGeom prst="rect">
-            <a:avLst/>
-          </a:prstGeom>
-          <a:noFill/>
-        </p:spPr>
-        <p:txBody>
-          <a:bodyPr wrap="square" rtlCol="0">
-            <a:spAutoFit/>
-          </a:bodyPr>
-          <a:lstStyle/>
-          <a:p>
-            <a:pPr algn="ctr"/>
-            <a:r>
-              <a:rPr lang="es-ES" b="1" dirty="0"/>
-              <a:t>Schizophrenia </a:t>
-            </a:r>
-            <a:r>
-              <a:rPr lang="es-ES" dirty="0"/>
-              <a:t>(SCZ)</a:t>
-            </a:r>
-          </a:p>
-          <a:p>
-            <a:pPr algn="ctr"/>
-            <a:r>
-              <a:rPr lang="es-ES" dirty="0"/>
-              <a:t>Left-</a:t>
-            </a:r>
-            <a:r>
-              <a:rPr lang="en-US" noProof="0" dirty="0"/>
-              <a:t>handed</a:t>
-            </a:r>
-            <a:r>
-              <a:rPr lang="es-ES" dirty="0"/>
-              <a:t>: ~20%</a:t>
-            </a:r>
-          </a:p>
-          <a:p>
-            <a:pPr algn="ctr"/>
-            <a:r>
-              <a:rPr lang="es-ES" dirty="0"/>
-              <a:t>NRH: ~35%</a:t>
-            </a:r>
-            <a:r>
-              <a:rPr lang="es-ES" b="1" dirty="0"/>
-              <a:t>**</a:t>
-            </a:r>
-          </a:p>
-        </p:txBody>
-      </p:sp>
-      <p:sp>
-        <p:nvSpPr>
-          <p:cNvPr id="8" name="CuadroTexto 7">
-            <a:extLst>
-              <a:ext uri="{FF2B5EF4-FFF2-40B4-BE49-F238E27FC236}">
-                <a16:creationId xmlns:a16="http://schemas.microsoft.com/office/drawing/2014/main" id="{F5D3924B-DEC9-564D-4C1E-F41BB1233C68}"/>
-              </a:ext>
-            </a:extLst>
-          </p:cNvPr>
-          <p:cNvSpPr txBox="1"/>
-          <p:nvPr/>
-        </p:nvSpPr>
-        <p:spPr>
-          <a:xfrm>
-            <a:off x="9067648" y="4273799"/>
-            <a:ext cx="2447221" cy="646331"/>
-          </a:xfrm>
-          <a:prstGeom prst="rect">
-            <a:avLst/>
-          </a:prstGeom>
-          <a:noFill/>
-          <a:ln>
-            <a:solidFill>
-              <a:srgbClr val="7030A0"/>
-            </a:solidFill>
-          </a:ln>
-        </p:spPr>
-        <p:txBody>
-          <a:bodyPr wrap="square" rtlCol="0">
-            <a:spAutoFit/>
-          </a:bodyPr>
-          <a:lstStyle/>
-          <a:p>
-            <a:pPr algn="ctr"/>
-            <a:r>
-              <a:rPr lang="es-ES" b="1" dirty="0"/>
-              <a:t>Bipolar disorder </a:t>
-            </a:r>
-            <a:r>
-              <a:rPr lang="es-ES" dirty="0"/>
-              <a:t>(BD)</a:t>
-            </a:r>
-          </a:p>
-          <a:p>
-            <a:pPr algn="ctr"/>
-            <a:r>
-              <a:rPr lang="es-ES" dirty="0"/>
-              <a:t>???</a:t>
-            </a:r>
-          </a:p>
-        </p:txBody>
-      </p:sp>
-      <p:sp>
-        <p:nvSpPr>
-          <p:cNvPr id="9" name="CuadroTexto 8">
-            <a:extLst>
-              <a:ext uri="{FF2B5EF4-FFF2-40B4-BE49-F238E27FC236}">
-                <a16:creationId xmlns:a16="http://schemas.microsoft.com/office/drawing/2014/main" id="{0B208FE0-A252-3BEE-7248-5F6ECD1E8CE2}"/>
-              </a:ext>
-            </a:extLst>
-          </p:cNvPr>
-          <p:cNvSpPr txBox="1"/>
-          <p:nvPr/>
-        </p:nvSpPr>
-        <p:spPr>
-          <a:xfrm>
-            <a:off x="9180173" y="2997620"/>
-            <a:ext cx="2222173" cy="646331"/>
-          </a:xfrm>
-          <a:prstGeom prst="rect">
-            <a:avLst/>
-          </a:prstGeom>
-          <a:noFill/>
-        </p:spPr>
-        <p:txBody>
-          <a:bodyPr wrap="square" rtlCol="0">
-            <a:spAutoFit/>
-          </a:bodyPr>
-          <a:lstStyle/>
-          <a:p>
-            <a:pPr algn="ctr"/>
-            <a:r>
-              <a:rPr lang="es-ES" b="1" dirty="0"/>
-              <a:t>Depression</a:t>
-            </a:r>
-            <a:r>
-              <a:rPr lang="es-ES" dirty="0"/>
-              <a:t> (DEP)</a:t>
-            </a:r>
-          </a:p>
-          <a:p>
-            <a:pPr algn="ctr"/>
-            <a:r>
-              <a:rPr lang="es-ES" dirty="0"/>
-              <a:t>NRH: 18</a:t>
-            </a:r>
-            <a:r>
-              <a:rPr lang="es-ES" dirty="0" smtClean="0"/>
-              <a:t>%</a:t>
-            </a:r>
-            <a:endParaRPr lang="es-ES" dirty="0"/>
-          </a:p>
-        </p:txBody>
-      </p:sp>
-      <p:sp>
-        <p:nvSpPr>
-          <p:cNvPr id="10" name="CuadroTexto 9">
-            <a:extLst>
-              <a:ext uri="{FF2B5EF4-FFF2-40B4-BE49-F238E27FC236}">
-                <a16:creationId xmlns:a16="http://schemas.microsoft.com/office/drawing/2014/main" id="{5AB82C21-CFEB-F5F2-0204-426DA9DE4F6F}"/>
-              </a:ext>
-            </a:extLst>
-          </p:cNvPr>
-          <p:cNvSpPr txBox="1"/>
-          <p:nvPr/>
-        </p:nvSpPr>
-        <p:spPr>
-          <a:xfrm>
-            <a:off x="5791436" y="4920130"/>
-            <a:ext cx="2173286" cy="646331"/>
-          </a:xfrm>
-          <a:prstGeom prst="rect">
-            <a:avLst/>
-          </a:prstGeom>
-          <a:noFill/>
-        </p:spPr>
-        <p:txBody>
-          <a:bodyPr wrap="square" rtlCol="0">
-            <a:spAutoFit/>
-          </a:bodyPr>
-          <a:lstStyle/>
-          <a:p>
-            <a:pPr algn="ctr"/>
-            <a:r>
-              <a:rPr lang="es-ES" b="1" dirty="0"/>
-              <a:t>Autism </a:t>
-            </a:r>
-            <a:r>
-              <a:rPr lang="es-ES" dirty="0"/>
-              <a:t>(ASD)</a:t>
-            </a:r>
-          </a:p>
-          <a:p>
-            <a:pPr algn="ctr"/>
-            <a:r>
-              <a:rPr lang="es-ES" dirty="0"/>
-              <a:t>NRH: ~35</a:t>
-            </a:r>
-            <a:r>
-              <a:rPr lang="es-ES" dirty="0" smtClean="0"/>
-              <a:t>%</a:t>
-            </a:r>
-            <a:r>
-              <a:rPr lang="es-ES" b="1" dirty="0" smtClean="0"/>
-              <a:t>**</a:t>
-            </a:r>
-            <a:endParaRPr lang="es-ES" b="1" dirty="0"/>
-          </a:p>
-        </p:txBody>
-      </p:sp>
-      <p:sp>
-        <p:nvSpPr>
-          <p:cNvPr id="11" name="CuadroTexto 10">
-            <a:extLst>
-              <a:ext uri="{FF2B5EF4-FFF2-40B4-BE49-F238E27FC236}">
-                <a16:creationId xmlns:a16="http://schemas.microsoft.com/office/drawing/2014/main" id="{DD7F7974-D189-5E3B-3511-1044205A7774}"/>
-              </a:ext>
-            </a:extLst>
-          </p:cNvPr>
-          <p:cNvSpPr txBox="1"/>
-          <p:nvPr/>
-        </p:nvSpPr>
-        <p:spPr>
-          <a:xfrm>
-            <a:off x="5927845" y="4060778"/>
-            <a:ext cx="1900468" cy="646331"/>
-          </a:xfrm>
-          <a:prstGeom prst="rect">
-            <a:avLst/>
-          </a:prstGeom>
-          <a:noFill/>
-        </p:spPr>
-        <p:txBody>
-          <a:bodyPr wrap="square" rtlCol="0">
-            <a:spAutoFit/>
-          </a:bodyPr>
-          <a:lstStyle/>
-          <a:p>
-            <a:pPr algn="ctr"/>
-            <a:r>
-              <a:rPr lang="es-ES" b="1" dirty="0"/>
-              <a:t>ADHD</a:t>
-            </a:r>
-          </a:p>
-          <a:p>
-            <a:pPr algn="ctr"/>
-            <a:r>
-              <a:rPr lang="es-ES" dirty="0"/>
-              <a:t>NRH: ~25%</a:t>
-            </a:r>
-            <a:r>
-              <a:rPr lang="es-ES" b="1" dirty="0"/>
-              <a:t>*</a:t>
-            </a:r>
-          </a:p>
-        </p:txBody>
-      </p:sp>
-      <p:sp>
-        <p:nvSpPr>
-          <p:cNvPr id="12" name="CuadroTexto 11">
-            <a:extLst>
-              <a:ext uri="{FF2B5EF4-FFF2-40B4-BE49-F238E27FC236}">
-                <a16:creationId xmlns:a16="http://schemas.microsoft.com/office/drawing/2014/main" id="{2D0DFF0B-E50B-06BF-66F5-31A1A2654E16}"/>
-              </a:ext>
-            </a:extLst>
-          </p:cNvPr>
-          <p:cNvSpPr txBox="1"/>
-          <p:nvPr/>
-        </p:nvSpPr>
-        <p:spPr>
-          <a:xfrm>
-            <a:off x="9180173" y="5484916"/>
-            <a:ext cx="2601069" cy="1200329"/>
-          </a:xfrm>
-          <a:prstGeom prst="rect">
-            <a:avLst/>
-          </a:prstGeom>
-          <a:solidFill>
-            <a:schemeClr val="bg1">
-              <a:lumMod val="95000"/>
-            </a:schemeClr>
-          </a:solidFill>
-        </p:spPr>
-        <p:txBody>
-          <a:bodyPr wrap="square" rtlCol="0">
-            <a:spAutoFit/>
-          </a:bodyPr>
-          <a:lstStyle/>
-          <a:p>
-            <a:r>
-              <a:rPr lang="es-ES" sz="1800" u="sng" dirty="0"/>
-              <a:t>No concordant pattern:</a:t>
-            </a:r>
-          </a:p>
-          <a:p>
-            <a:r>
-              <a:rPr lang="es-ES" sz="1800" dirty="0"/>
-              <a:t>Small sample sizes</a:t>
-            </a:r>
-          </a:p>
-          <a:p>
-            <a:r>
-              <a:rPr lang="es-ES" sz="1800" dirty="0"/>
-              <a:t>Lack of clinical data</a:t>
-            </a:r>
-          </a:p>
-          <a:p>
-            <a:r>
-              <a:rPr lang="es-ES" sz="1800" dirty="0"/>
-              <a:t>Diverse measurements</a:t>
-            </a:r>
-          </a:p>
-        </p:txBody>
-      </p:sp>
-      <p:sp>
-        <p:nvSpPr>
-          <p:cNvPr id="3" name="CuadroTexto 2"/>
-          <p:cNvSpPr txBox="1"/>
-          <p:nvPr/>
-        </p:nvSpPr>
-        <p:spPr>
-          <a:xfrm>
-            <a:off x="6111212" y="1746093"/>
-            <a:ext cx="5151175" cy="830997"/>
-          </a:xfrm>
-          <a:prstGeom prst="rect">
-            <a:avLst/>
-          </a:prstGeom>
-          <a:solidFill>
-            <a:schemeClr val="accent4">
-              <a:lumMod val="20000"/>
-              <a:lumOff val="80000"/>
-            </a:schemeClr>
-          </a:solidFill>
-        </p:spPr>
-        <p:txBody>
-          <a:bodyPr wrap="square" rtlCol="0">
-            <a:spAutoFit/>
-          </a:bodyPr>
-          <a:lstStyle/>
-          <a:p>
-            <a:pPr algn="ctr"/>
-            <a:r>
-              <a:rPr lang="es-ES" sz="2400" b="1" dirty="0" smtClean="0"/>
-              <a:t>&gt; NRH in disorders </a:t>
-            </a:r>
-            <a:r>
-              <a:rPr lang="es-ES" sz="2400" b="1" dirty="0" err="1" smtClean="0"/>
-              <a:t>with</a:t>
-            </a:r>
-            <a:r>
-              <a:rPr lang="es-ES" sz="2400" b="1" dirty="0" smtClean="0"/>
-              <a:t> </a:t>
-            </a:r>
-            <a:r>
-              <a:rPr lang="es-ES" sz="2400" b="1" dirty="0" err="1" smtClean="0"/>
-              <a:t>early</a:t>
-            </a:r>
-            <a:r>
-              <a:rPr lang="es-ES" sz="2400" b="1" dirty="0" smtClean="0"/>
-              <a:t> </a:t>
-            </a:r>
-            <a:r>
-              <a:rPr lang="es-ES" sz="2400" b="1" dirty="0" err="1" smtClean="0"/>
-              <a:t>age</a:t>
-            </a:r>
-            <a:r>
-              <a:rPr lang="es-ES" sz="2400" b="1" dirty="0" smtClean="0"/>
-              <a:t> of </a:t>
-            </a:r>
-            <a:r>
-              <a:rPr lang="es-ES" sz="2400" b="1" dirty="0" err="1" smtClean="0"/>
-              <a:t>onset</a:t>
-            </a:r>
-            <a:r>
-              <a:rPr lang="es-ES" sz="2400" b="1" dirty="0" smtClean="0"/>
-              <a:t> and more </a:t>
-            </a:r>
-            <a:r>
-              <a:rPr lang="es-ES" sz="2400" b="1" dirty="0" err="1" smtClean="0"/>
-              <a:t>prevalence</a:t>
-            </a:r>
-            <a:r>
-              <a:rPr lang="es-ES" sz="2400" b="1" dirty="0" smtClean="0"/>
-              <a:t> in males</a:t>
-            </a:r>
-            <a:endParaRPr lang="en-GB" sz="2400" b="1" dirty="0"/>
-          </a:p>
-        </p:txBody>
-      </p:sp>
-    </p:spTree>
-    <p:extLst>
-      <p:ext uri="{BB962C8B-B14F-4D97-AF65-F5344CB8AC3E}">
-        <p14:creationId xmlns:p14="http://schemas.microsoft.com/office/powerpoint/2010/main" val="3899370187"/>
-      </p:ext>
-    </p:extLst>
-  </p:cSld>
-  <p:clrMapOvr>
-    <a:masterClrMapping/>
-  </p:clrMapOvr>
-  <p:timing>
-    <p:tnLst>
-      <p:par>
-        <p:cTn id="1" dur="indefinite" restart="never" nodeType="tmRoot"/>
-      </p:par>
-    </p:tnLst>
-  </p:timing>
-</p:sld>
-</file>
-
-<file path=ppt/slides/slide5.xml><?xml version="1.0" encoding="utf-8"?>
+<file path=ppt/slides/slide6.xml><?xml version="1.0" encoding="utf-8"?>
 <p:sld xmlns:a="http://schemas.openxmlformats.org/drawingml/2006/main" xmlns:r="http://schemas.openxmlformats.org/officeDocument/2006/relationships" xmlns:p="http://schemas.openxmlformats.org/presentationml/2006/main">
   <p:cSld>
     <p:spTree>
@@ -7186,6 +8344,398 @@
           </a:prstGeom>
         </p:spPr>
       </p:pic>
+      <p:sp>
+        <p:nvSpPr>
+          <p:cNvPr id="9" name="CuadroTexto 8"/>
+          <p:cNvSpPr txBox="1"/>
+          <p:nvPr/>
+        </p:nvSpPr>
+        <p:spPr>
+          <a:xfrm>
+            <a:off x="339081" y="6234004"/>
+            <a:ext cx="4136994" cy="261610"/>
+          </a:xfrm>
+          <a:prstGeom prst="rect">
+            <a:avLst/>
+          </a:prstGeom>
+          <a:noFill/>
+        </p:spPr>
+        <p:txBody>
+          <a:bodyPr wrap="square" rtlCol="0">
+            <a:spAutoFit/>
+          </a:bodyPr>
+          <a:lstStyle/>
+          <a:p>
+            <a:r>
+              <a:rPr lang="es-ES" sz="1100" dirty="0" smtClean="0"/>
+              <a:t>García-Ortiz et al. 2026</a:t>
+            </a:r>
+            <a:endParaRPr lang="en-GB" sz="1100" dirty="0"/>
+          </a:p>
+        </p:txBody>
+      </p:sp>
+      <p:pic>
+        <p:nvPicPr>
+          <p:cNvPr id="11" name="Google Shape;86;p17">
+            <a:extLst>
+              <a:ext uri="{FF2B5EF4-FFF2-40B4-BE49-F238E27FC236}">
+                <a16:creationId xmlns:a16="http://schemas.microsoft.com/office/drawing/2014/main" id="{C0A78BE3-2958-3745-B10C-C35A9F7F1CB6}"/>
+              </a:ext>
+            </a:extLst>
+          </p:cNvPr>
+          <p:cNvPicPr preferRelativeResize="0"/>
+          <p:nvPr/>
+        </p:nvPicPr>
+        <p:blipFill>
+          <a:blip r:embed="rId5">
+            <a:alphaModFix/>
+          </a:blip>
+          <a:stretch>
+            <a:fillRect/>
+          </a:stretch>
+        </p:blipFill>
+        <p:spPr>
+          <a:xfrm>
+            <a:off x="7844810" y="2872486"/>
+            <a:ext cx="1503675" cy="1149075"/>
+          </a:xfrm>
+          <a:prstGeom prst="rect">
+            <a:avLst/>
+          </a:prstGeom>
+          <a:noFill/>
+          <a:ln>
+            <a:noFill/>
+          </a:ln>
+        </p:spPr>
+      </p:pic>
+      <p:pic>
+        <p:nvPicPr>
+          <p:cNvPr id="12" name="Google Shape;85;p17">
+            <a:extLst>
+              <a:ext uri="{FF2B5EF4-FFF2-40B4-BE49-F238E27FC236}">
+                <a16:creationId xmlns:a16="http://schemas.microsoft.com/office/drawing/2014/main" id="{74E3E47A-A681-5DA4-D980-43CE26E23F2B}"/>
+              </a:ext>
+            </a:extLst>
+          </p:cNvPr>
+          <p:cNvPicPr preferRelativeResize="0"/>
+          <p:nvPr/>
+        </p:nvPicPr>
+        <p:blipFill>
+          <a:blip r:embed="rId6">
+            <a:alphaModFix/>
+          </a:blip>
+          <a:stretch/>
+        </p:blipFill>
+        <p:spPr>
+          <a:xfrm>
+            <a:off x="9971415" y="2851021"/>
+            <a:ext cx="1503671" cy="1149074"/>
+          </a:xfrm>
+          <a:prstGeom prst="rect">
+            <a:avLst/>
+          </a:prstGeom>
+          <a:noFill/>
+          <a:ln>
+            <a:noFill/>
+          </a:ln>
+        </p:spPr>
+      </p:pic>
+      <p:sp>
+        <p:nvSpPr>
+          <p:cNvPr id="13" name="CuadroTexto 12"/>
+          <p:cNvSpPr txBox="1"/>
+          <p:nvPr/>
+        </p:nvSpPr>
+        <p:spPr>
+          <a:xfrm>
+            <a:off x="10108842" y="2423003"/>
+            <a:ext cx="1228815" cy="461665"/>
+          </a:xfrm>
+          <a:prstGeom prst="rect">
+            <a:avLst/>
+          </a:prstGeom>
+          <a:noFill/>
+          <a:ln w="38100">
+            <a:solidFill>
+              <a:srgbClr val="FF0000"/>
+            </a:solidFill>
+          </a:ln>
+        </p:spPr>
+        <p:txBody>
+          <a:bodyPr wrap="square" rtlCol="0">
+            <a:spAutoFit/>
+          </a:bodyPr>
+          <a:lstStyle/>
+          <a:p>
+            <a:pPr algn="ctr"/>
+            <a:r>
+              <a:rPr lang="es-ES" sz="2400" b="1" dirty="0" smtClean="0"/>
+              <a:t>433 BD</a:t>
+            </a:r>
+            <a:endParaRPr lang="en-GB" sz="2400" b="1" dirty="0"/>
+          </a:p>
+        </p:txBody>
+      </p:sp>
+      <p:sp>
+        <p:nvSpPr>
+          <p:cNvPr id="14" name="CuadroTexto 13"/>
+          <p:cNvSpPr txBox="1"/>
+          <p:nvPr/>
+        </p:nvSpPr>
+        <p:spPr>
+          <a:xfrm>
+            <a:off x="7580843" y="2423004"/>
+            <a:ext cx="2079107" cy="461665"/>
+          </a:xfrm>
+          <a:prstGeom prst="rect">
+            <a:avLst/>
+          </a:prstGeom>
+          <a:noFill/>
+          <a:ln w="38100">
+            <a:solidFill>
+              <a:srgbClr val="FF0000"/>
+            </a:solidFill>
+          </a:ln>
+        </p:spPr>
+        <p:txBody>
+          <a:bodyPr wrap="square" rtlCol="0">
+            <a:spAutoFit/>
+          </a:bodyPr>
+          <a:lstStyle/>
+          <a:p>
+            <a:pPr algn="ctr"/>
+            <a:r>
+              <a:rPr lang="es-ES" sz="2400" b="1" dirty="0" smtClean="0"/>
+              <a:t>1,480 </a:t>
+            </a:r>
+            <a:r>
+              <a:rPr lang="es-ES" sz="2400" b="1" dirty="0" err="1" smtClean="0"/>
+              <a:t>controls</a:t>
+            </a:r>
+            <a:endParaRPr lang="en-GB" sz="2400" b="1" dirty="0"/>
+          </a:p>
+        </p:txBody>
+      </p:sp>
+      <p:sp>
+        <p:nvSpPr>
+          <p:cNvPr id="15" name="CuadroTexto 14"/>
+          <p:cNvSpPr txBox="1"/>
+          <p:nvPr/>
+        </p:nvSpPr>
+        <p:spPr>
+          <a:xfrm>
+            <a:off x="9287214" y="5294935"/>
+            <a:ext cx="2312180" cy="1200329"/>
+          </a:xfrm>
+          <a:prstGeom prst="rect">
+            <a:avLst/>
+          </a:prstGeom>
+          <a:noFill/>
+          <a:ln w="38100">
+            <a:solidFill>
+              <a:schemeClr val="bg2"/>
+            </a:solidFill>
+          </a:ln>
+        </p:spPr>
+        <p:txBody>
+          <a:bodyPr wrap="square" rtlCol="0">
+            <a:spAutoFit/>
+          </a:bodyPr>
+          <a:lstStyle>
+            <a:defPPr>
+              <a:defRPr lang="en-US"/>
+            </a:defPPr>
+            <a:lvl1pPr algn="ctr">
+              <a:defRPr b="1"/>
+            </a:lvl1pPr>
+          </a:lstStyle>
+          <a:p>
+            <a:r>
+              <a:rPr lang="es-ES" sz="2400" dirty="0"/>
+              <a:t>BD </a:t>
+            </a:r>
+            <a:r>
+              <a:rPr lang="es-ES" sz="2400" dirty="0" err="1"/>
+              <a:t>subtype</a:t>
+            </a:r>
+            <a:endParaRPr lang="es-ES" sz="2400" dirty="0"/>
+          </a:p>
+          <a:p>
+            <a:r>
+              <a:rPr lang="es-ES" sz="2400" dirty="0" err="1"/>
+              <a:t>Clinical</a:t>
+            </a:r>
+            <a:r>
+              <a:rPr lang="es-ES" sz="2400" dirty="0"/>
+              <a:t> </a:t>
+            </a:r>
+            <a:r>
+              <a:rPr lang="es-ES" sz="2400" dirty="0" err="1"/>
+              <a:t>history</a:t>
+            </a:r>
+            <a:endParaRPr lang="es-ES" sz="2400" dirty="0"/>
+          </a:p>
+          <a:p>
+            <a:r>
+              <a:rPr lang="es-ES" sz="2400" dirty="0" err="1"/>
+              <a:t>Severity</a:t>
+            </a:r>
+            <a:r>
+              <a:rPr lang="es-ES" sz="2400" dirty="0"/>
+              <a:t> </a:t>
+            </a:r>
+            <a:r>
+              <a:rPr lang="es-ES" sz="2400" dirty="0" err="1"/>
+              <a:t>scales</a:t>
+            </a:r>
+            <a:endParaRPr lang="es-ES" sz="2400" dirty="0"/>
+          </a:p>
+        </p:txBody>
+      </p:sp>
+      <p:sp>
+        <p:nvSpPr>
+          <p:cNvPr id="16" name="Cerrar llave 15"/>
+          <p:cNvSpPr/>
+          <p:nvPr/>
+        </p:nvSpPr>
+        <p:spPr>
+          <a:xfrm rot="5400000">
+            <a:off x="9380584" y="2024740"/>
+            <a:ext cx="294759" cy="3894242"/>
+          </a:xfrm>
+          <a:prstGeom prst="rightBrace">
+            <a:avLst/>
+          </a:prstGeom>
+          <a:ln w="38100">
+            <a:solidFill>
+              <a:schemeClr val="tx1"/>
+            </a:solidFill>
+          </a:ln>
+        </p:spPr>
+        <p:style>
+          <a:lnRef idx="1">
+            <a:schemeClr val="accent1"/>
+          </a:lnRef>
+          <a:fillRef idx="0">
+            <a:schemeClr val="accent1"/>
+          </a:fillRef>
+          <a:effectRef idx="0">
+            <a:schemeClr val="accent1"/>
+          </a:effectRef>
+          <a:fontRef idx="minor">
+            <a:schemeClr val="tx1"/>
+          </a:fontRef>
+        </p:style>
+        <p:txBody>
+          <a:bodyPr rtlCol="0" anchor="ctr"/>
+          <a:lstStyle/>
+          <a:p>
+            <a:pPr algn="ctr"/>
+            <a:endParaRPr lang="en-GB"/>
+          </a:p>
+        </p:txBody>
+      </p:sp>
+      <p:cxnSp>
+        <p:nvCxnSpPr>
+          <p:cNvPr id="18" name="Conector recto de flecha 17"/>
+          <p:cNvCxnSpPr/>
+          <p:nvPr/>
+        </p:nvCxnSpPr>
+        <p:spPr>
+          <a:xfrm>
+            <a:off x="10979173" y="3933771"/>
+            <a:ext cx="17755" cy="1316381"/>
+          </a:xfrm>
+          <a:prstGeom prst="straightConnector1">
+            <a:avLst/>
+          </a:prstGeom>
+          <a:ln w="57150">
+            <a:solidFill>
+              <a:schemeClr val="tx1"/>
+            </a:solidFill>
+            <a:headEnd type="none" w="med" len="med"/>
+            <a:tailEnd type="triangle" w="med" len="med"/>
+          </a:ln>
+        </p:spPr>
+        <p:style>
+          <a:lnRef idx="1">
+            <a:schemeClr val="accent1"/>
+          </a:lnRef>
+          <a:fillRef idx="0">
+            <a:schemeClr val="accent1"/>
+          </a:fillRef>
+          <a:effectRef idx="0">
+            <a:schemeClr val="accent1"/>
+          </a:effectRef>
+          <a:fontRef idx="minor">
+            <a:schemeClr val="tx1"/>
+          </a:fontRef>
+        </p:style>
+      </p:cxnSp>
+      <p:sp>
+        <p:nvSpPr>
+          <p:cNvPr id="3" name="CuadroTexto 2"/>
+          <p:cNvSpPr txBox="1"/>
+          <p:nvPr/>
+        </p:nvSpPr>
+        <p:spPr>
+          <a:xfrm>
+            <a:off x="8172859" y="4164024"/>
+            <a:ext cx="2710207" cy="830997"/>
+          </a:xfrm>
+          <a:prstGeom prst="rect">
+            <a:avLst/>
+          </a:prstGeom>
+          <a:solidFill>
+            <a:schemeClr val="bg1"/>
+          </a:solidFill>
+          <a:ln w="38100">
+            <a:solidFill>
+              <a:schemeClr val="bg2"/>
+            </a:solidFill>
+          </a:ln>
+        </p:spPr>
+        <p:txBody>
+          <a:bodyPr wrap="square" rtlCol="0">
+            <a:spAutoFit/>
+          </a:bodyPr>
+          <a:lstStyle/>
+          <a:p>
+            <a:pPr algn="ctr"/>
+            <a:r>
+              <a:rPr lang="es-ES" sz="2400" b="1" dirty="0" smtClean="0"/>
+              <a:t>EHI</a:t>
+            </a:r>
+          </a:p>
+          <a:p>
+            <a:pPr algn="ctr"/>
+            <a:r>
+              <a:rPr lang="es-ES" sz="2400" b="1" dirty="0" err="1" smtClean="0"/>
+              <a:t>preferred</a:t>
+            </a:r>
+            <a:r>
+              <a:rPr lang="es-ES" sz="2400" b="1" dirty="0" smtClean="0"/>
+              <a:t> </a:t>
+            </a:r>
+            <a:r>
+              <a:rPr lang="es-ES" sz="2400" b="1" dirty="0" err="1" smtClean="0"/>
+              <a:t>foot</a:t>
+            </a:r>
+            <a:r>
+              <a:rPr lang="es-ES" sz="2400" b="1" dirty="0" smtClean="0"/>
+              <a:t>/</a:t>
+            </a:r>
+            <a:r>
+              <a:rPr lang="es-ES" sz="2400" b="1" dirty="0" err="1" smtClean="0"/>
+              <a:t>eye</a:t>
+            </a:r>
+            <a:r>
+              <a:rPr lang="es-ES" sz="2400" b="1" dirty="0" smtClean="0"/>
+              <a:t> </a:t>
+            </a:r>
+          </a:p>
+        </p:txBody>
+      </p:sp>
     </p:spTree>
     <p:extLst>
       <p:ext uri="{BB962C8B-B14F-4D97-AF65-F5344CB8AC3E}">
@@ -7199,98 +8749,105 @@
   <p:timing>
     <p:tnLst>
       <p:par>
-        <p:cTn id="1" dur="indefinite" restart="never" nodeType="tmRoot"/>
-      </p:par>
-    </p:tnLst>
-  </p:timing>
-</p:sld>
-</file>
-
-<file path=ppt/slides/slide6.xml><?xml version="1.0" encoding="utf-8"?>
-<p:sld xmlns:a="http://schemas.openxmlformats.org/drawingml/2006/main" xmlns:r="http://schemas.openxmlformats.org/officeDocument/2006/relationships" xmlns:p="http://schemas.openxmlformats.org/presentationml/2006/main">
-  <p:cSld>
-    <p:spTree>
-      <p:nvGrpSpPr>
-        <p:cNvPr id="1" name=""/>
-        <p:cNvGrpSpPr/>
-        <p:nvPr/>
-      </p:nvGrpSpPr>
-      <p:grpSpPr>
-        <a:xfrm>
-          <a:off x="0" y="0"/>
-          <a:ext cx="0" cy="0"/>
-          <a:chOff x="0" y="0"/>
-          <a:chExt cx="0" cy="0"/>
-        </a:xfrm>
-      </p:grpSpPr>
-      <p:sp>
-        <p:nvSpPr>
-          <p:cNvPr id="2" name="Título 1"/>
-          <p:cNvSpPr>
-            <a:spLocks noGrp="1"/>
-          </p:cNvSpPr>
-          <p:nvPr>
-            <p:ph type="title"/>
-          </p:nvPr>
-        </p:nvSpPr>
-        <p:spPr/>
-        <p:txBody>
-          <a:bodyPr/>
-          <a:lstStyle/>
-          <a:p>
-            <a:r>
-              <a:rPr lang="es-ES" dirty="0" smtClean="0"/>
-              <a:t>NRH in </a:t>
-            </a:r>
-            <a:r>
-              <a:rPr lang="es-ES" dirty="0" err="1" smtClean="0"/>
-              <a:t>Spanish</a:t>
-            </a:r>
-            <a:r>
-              <a:rPr lang="es-ES" dirty="0" smtClean="0"/>
-              <a:t> </a:t>
-            </a:r>
-            <a:r>
-              <a:rPr lang="es-ES" dirty="0" err="1" smtClean="0"/>
-              <a:t>population</a:t>
-            </a:r>
-            <a:endParaRPr lang="en-GB" dirty="0"/>
-          </a:p>
-        </p:txBody>
-      </p:sp>
-      <p:sp>
-        <p:nvSpPr>
-          <p:cNvPr id="3" name="Marcador de contenido 2"/>
-          <p:cNvSpPr>
-            <a:spLocks noGrp="1"/>
-          </p:cNvSpPr>
-          <p:nvPr>
-            <p:ph idx="1"/>
-          </p:nvPr>
-        </p:nvSpPr>
-        <p:spPr/>
-        <p:txBody>
-          <a:bodyPr/>
-          <a:lstStyle/>
-          <a:p>
-            <a:endParaRPr lang="en-GB"/>
-          </a:p>
-        </p:txBody>
-      </p:sp>
-    </p:spTree>
-    <p:extLst>
-      <p:ext uri="{BB962C8B-B14F-4D97-AF65-F5344CB8AC3E}">
-        <p14:creationId xmlns:p14="http://schemas.microsoft.com/office/powerpoint/2010/main" val="3336730078"/>
-      </p:ext>
-    </p:extLst>
-  </p:cSld>
-  <p:clrMapOvr>
-    <a:masterClrMapping/>
-  </p:clrMapOvr>
-  <p:timing>
-    <p:tnLst>
-      <p:par>
-        <p:cTn id="1" dur="indefinite" restart="never" nodeType="tmRoot"/>
+        <p:cTn id="1" dur="indefinite" restart="never" nodeType="tmRoot">
+          <p:childTnLst>
+            <p:seq concurrent="1" nextAc="seek">
+              <p:cTn id="2" dur="indefinite" nodeType="mainSeq">
+                <p:childTnLst>
+                  <p:par>
+                    <p:cTn id="3" fill="hold">
+                      <p:stCondLst>
+                        <p:cond delay="indefinite"/>
+                        <p:cond evt="onBegin" delay="0">
+                          <p:tn val="2"/>
+                        </p:cond>
+                      </p:stCondLst>
+                      <p:childTnLst>
+                        <p:par>
+                          <p:cTn id="4" fill="hold">
+                            <p:stCondLst>
+                              <p:cond delay="0"/>
+                            </p:stCondLst>
+                            <p:childTnLst>
+                              <p:par>
+                                <p:cTn id="5" presetID="1" presetClass="entr" presetSubtype="0" fill="hold" nodeType="withEffect">
+                                  <p:stCondLst>
+                                    <p:cond delay="0"/>
+                                  </p:stCondLst>
+                                  <p:childTnLst>
+                                    <p:set>
+                                      <p:cBhvr>
+                                        <p:cTn id="6" dur="1" fill="hold">
+                                          <p:stCondLst>
+                                            <p:cond delay="0"/>
+                                          </p:stCondLst>
+                                        </p:cTn>
+                                        <p:tgtEl>
+                                          <p:spTgt spid="12"/>
+                                        </p:tgtEl>
+                                        <p:attrNameLst>
+                                          <p:attrName>style.visibility</p:attrName>
+                                        </p:attrNameLst>
+                                      </p:cBhvr>
+                                      <p:to>
+                                        <p:strVal val="visible"/>
+                                      </p:to>
+                                    </p:set>
+                                  </p:childTnLst>
+                                </p:cTn>
+                              </p:par>
+                              <p:par>
+                                <p:cTn id="7" presetID="1" presetClass="entr" presetSubtype="0" fill="hold" nodeType="withEffect">
+                                  <p:stCondLst>
+                                    <p:cond delay="0"/>
+                                  </p:stCondLst>
+                                  <p:childTnLst>
+                                    <p:set>
+                                      <p:cBhvr>
+                                        <p:cTn id="8" dur="1" fill="hold">
+                                          <p:stCondLst>
+                                            <p:cond delay="0"/>
+                                          </p:stCondLst>
+                                        </p:cTn>
+                                        <p:tgtEl>
+                                          <p:spTgt spid="11"/>
+                                        </p:tgtEl>
+                                        <p:attrNameLst>
+                                          <p:attrName>style.visibility</p:attrName>
+                                        </p:attrNameLst>
+                                      </p:cBhvr>
+                                      <p:to>
+                                        <p:strVal val="visible"/>
+                                      </p:to>
+                                    </p:set>
+                                  </p:childTnLst>
+                                </p:cTn>
+                              </p:par>
+                            </p:childTnLst>
+                          </p:cTn>
+                        </p:par>
+                      </p:childTnLst>
+                    </p:cTn>
+                  </p:par>
+                </p:childTnLst>
+              </p:cTn>
+              <p:prevCondLst>
+                <p:cond evt="onPrev" delay="0">
+                  <p:tgtEl>
+                    <p:sldTgt/>
+                  </p:tgtEl>
+                </p:cond>
+              </p:prevCondLst>
+              <p:nextCondLst>
+                <p:cond evt="onNext" delay="0">
+                  <p:tgtEl>
+                    <p:sldTgt/>
+                  </p:tgtEl>
+                </p:cond>
+              </p:nextCondLst>
+            </p:seq>
+          </p:childTnLst>
+        </p:cTn>
       </p:par>
     </p:tnLst>
   </p:timing>
@@ -7331,11 +8888,11 @@
           <a:p>
             <a:r>
               <a:rPr lang="es-ES" dirty="0" smtClean="0"/>
-              <a:t>Case-control </a:t>
+              <a:t>NRH in </a:t>
             </a:r>
             <a:r>
               <a:rPr lang="es-ES" dirty="0" err="1" smtClean="0"/>
-              <a:t>handedness</a:t>
+              <a:t>Spanish</a:t>
             </a:r>
             <a:r>
               <a:rPr lang="es-ES" dirty="0" smtClean="0"/>
@@ -7343,7 +8900,7 @@
             </a:r>
             <a:r>
               <a:rPr lang="es-ES" dirty="0" err="1" smtClean="0"/>
-              <a:t>study</a:t>
+              <a:t>population</a:t>
             </a:r>
             <a:endParaRPr lang="en-GB" dirty="0"/>
           </a:p>
@@ -7371,7 +8928,7 @@
     </p:spTree>
     <p:extLst>
       <p:ext uri="{BB962C8B-B14F-4D97-AF65-F5344CB8AC3E}">
-        <p14:creationId xmlns:p14="http://schemas.microsoft.com/office/powerpoint/2010/main" val="4032295792"/>
+        <p14:creationId xmlns:p14="http://schemas.microsoft.com/office/powerpoint/2010/main" val="3336730078"/>
       </p:ext>
     </p:extLst>
   </p:cSld>
@@ -7422,33 +8979,61 @@
           <a:p>
             <a:r>
               <a:rPr lang="es-ES" dirty="0" err="1" smtClean="0"/>
-              <a:t>Within</a:t>
+              <a:t>Demographics</a:t>
             </a:r>
             <a:r>
               <a:rPr lang="es-ES" dirty="0" smtClean="0"/>
-              <a:t> BD</a:t>
+              <a:t> and </a:t>
+            </a:r>
+            <a:r>
+              <a:rPr lang="es-ES" dirty="0" err="1" smtClean="0"/>
+              <a:t>need</a:t>
+            </a:r>
+            <a:r>
+              <a:rPr lang="es-ES" dirty="0" smtClean="0"/>
+              <a:t> of </a:t>
+            </a:r>
+            <a:r>
+              <a:rPr lang="es-ES" dirty="0" err="1" smtClean="0"/>
+              <a:t>age</a:t>
+            </a:r>
+            <a:r>
+              <a:rPr lang="es-ES" dirty="0" smtClean="0"/>
+              <a:t> match</a:t>
             </a:r>
             <a:endParaRPr lang="en-GB" dirty="0"/>
+          </a:p>
+        </p:txBody>
+      </p:sp>
+      <p:sp>
+        <p:nvSpPr>
+          <p:cNvPr id="3" name="Marcador de contenido 2"/>
+          <p:cNvSpPr>
+            <a:spLocks noGrp="1"/>
+          </p:cNvSpPr>
+          <p:nvPr>
+            <p:ph idx="1"/>
+          </p:nvPr>
+        </p:nvSpPr>
+        <p:spPr/>
+        <p:txBody>
+          <a:bodyPr/>
+          <a:lstStyle/>
+          <a:p>
+            <a:endParaRPr lang="en-GB"/>
           </a:p>
         </p:txBody>
       </p:sp>
     </p:spTree>
     <p:extLst>
       <p:ext uri="{BB962C8B-B14F-4D97-AF65-F5344CB8AC3E}">
-        <p14:creationId xmlns:p14="http://schemas.microsoft.com/office/powerpoint/2010/main" val="2591658526"/>
+        <p14:creationId xmlns:p14="http://schemas.microsoft.com/office/powerpoint/2010/main" val="2371809496"/>
       </p:ext>
     </p:extLst>
   </p:cSld>
   <p:clrMapOvr>
     <a:masterClrMapping/>
   </p:clrMapOvr>
-  <p:timing>
-    <p:tnLst>
-      <p:par>
-        <p:cTn id="1" dur="indefinite" restart="never" nodeType="tmRoot"/>
-      </p:par>
-    </p:tnLst>
-  </p:timing>
 </p:sld>
 </file>
 
@@ -7486,7 +9071,19 @@
           <a:p>
             <a:r>
               <a:rPr lang="es-ES" dirty="0" smtClean="0"/>
-              <a:t>PRS</a:t>
+              <a:t>Case-control </a:t>
+            </a:r>
+            <a:r>
+              <a:rPr lang="es-ES" dirty="0" err="1" smtClean="0"/>
+              <a:t>handedness</a:t>
+            </a:r>
+            <a:r>
+              <a:rPr lang="es-ES" dirty="0" smtClean="0"/>
+              <a:t> </a:t>
+            </a:r>
+            <a:r>
+              <a:rPr lang="es-ES" dirty="0" err="1" smtClean="0"/>
+              <a:t>study</a:t>
             </a:r>
             <a:endParaRPr lang="en-GB" dirty="0"/>
           </a:p>
@@ -7514,7 +9111,7 @@
     </p:spTree>
     <p:extLst>
       <p:ext uri="{BB962C8B-B14F-4D97-AF65-F5344CB8AC3E}">
-        <p14:creationId xmlns:p14="http://schemas.microsoft.com/office/powerpoint/2010/main" val="989496482"/>
+        <p14:creationId xmlns:p14="http://schemas.microsoft.com/office/powerpoint/2010/main" val="4032295792"/>
       </p:ext>
     </p:extLst>
   </p:cSld>
